--- a/public/fun/pack/pptx/wedding/결혼식_17_러브스토리중심_해바라기담장.pptx
+++ b/public/fun/pack/pptx/wedding/결혼식_17_러브스토리중심_해바라기담장.pptx
@@ -3347,7 +3347,7 @@
             <a:r>
               <a:rPr sz="3600" b="1" i="0">
                 <a:solidFill>
-                  <a:srgbClr val="6E570C"/>
+                  <a:srgbClr val="115F25"/>
                 </a:solidFill>
               </a:rPr>
               <a:t>저희 결혼합니다</a:t>
@@ -3385,7 +3385,7 @@
             <a:r>
               <a:rPr sz="1700" b="0" i="1">
                 <a:solidFill>
-                  <a:srgbClr val="6E570C"/>
+                  <a:srgbClr val="115F25"/>
                 </a:solidFill>
               </a:rPr>
               <a:t>싸우기도 많이 했고, 그만큼 풀기도 했습니다</a:t>
@@ -3460,7 +3460,7 @@
     <p:bg>
       <p:bgPr>
         <a:solidFill>
-          <a:srgbClr val="CAA016"/>
+          <a:srgbClr val="26C54E"/>
         </a:solidFill>
         <a:effectLst/>
       </p:bgPr>
@@ -3533,7 +3533,7 @@
             <a:r>
               <a:rPr sz="3000" b="1" i="0">
                 <a:solidFill>
-                  <a:srgbClr val="6E570C"/>
+                  <a:srgbClr val="115F25"/>
                 </a:solidFill>
               </a:rPr>
               <a:t>신랑 · 신부 소개</a:t>
@@ -3556,11 +3556,11 @@
             <a:avLst/>
           </a:prstGeom>
           <a:solidFill>
-            <a:srgbClr val="FAEEC6"/>
+            <a:srgbClr val="D1FADC"/>
           </a:solidFill>
           <a:ln w="19050">
             <a:solidFill>
-              <a:srgbClr val="CAA016"/>
+              <a:srgbClr val="26C54E"/>
             </a:solidFill>
             <a:prstDash val="dash"/>
           </a:ln>
@@ -3579,7 +3579,7 @@
             <a:r>
               <a:rPr sz="1200" b="0" i="0">
                 <a:solidFill>
-                  <a:srgbClr val="6E570C"/>
+                  <a:srgbClr val="115F25"/>
                 </a:solidFill>
               </a:rPr>
               <a:t>사진</a:t>
@@ -3617,7 +3617,7 @@
             <a:r>
               <a:rPr sz="1600" b="1" i="0">
                 <a:solidFill>
-                  <a:srgbClr val="6E570C"/>
+                  <a:srgbClr val="115F25"/>
                 </a:solidFill>
               </a:rPr>
               <a:t>신랑</a:t>
@@ -3708,11 +3708,11 @@
             <a:avLst/>
           </a:prstGeom>
           <a:solidFill>
-            <a:srgbClr val="FAEEC6"/>
+            <a:srgbClr val="D1FADC"/>
           </a:solidFill>
           <a:ln w="19050">
             <a:solidFill>
-              <a:srgbClr val="CAA016"/>
+              <a:srgbClr val="26C54E"/>
             </a:solidFill>
             <a:prstDash val="dash"/>
           </a:ln>
@@ -3731,7 +3731,7 @@
             <a:r>
               <a:rPr sz="1200" b="0" i="0">
                 <a:solidFill>
-                  <a:srgbClr val="6E570C"/>
+                  <a:srgbClr val="115F25"/>
                 </a:solidFill>
               </a:rPr>
               <a:t>사진</a:t>
@@ -3769,7 +3769,7 @@
             <a:r>
               <a:rPr sz="1600" b="1" i="0">
                 <a:solidFill>
-                  <a:srgbClr val="6E570C"/>
+                  <a:srgbClr val="115F25"/>
                 </a:solidFill>
               </a:rPr>
               <a:t>신부</a:t>
@@ -3859,7 +3859,7 @@
     <p:bg>
       <p:bgPr>
         <a:solidFill>
-          <a:srgbClr val="CAA016"/>
+          <a:srgbClr val="26C54E"/>
         </a:solidFill>
         <a:effectLst/>
       </p:bgPr>
@@ -3932,7 +3932,7 @@
             <a:r>
               <a:rPr sz="3000" b="1" i="0">
                 <a:solidFill>
-                  <a:srgbClr val="6E570C"/>
+                  <a:srgbClr val="115F25"/>
                 </a:solidFill>
               </a:rPr>
               <a:t>우리의 이야기</a:t>
@@ -3955,7 +3955,7 @@
             <a:avLst/>
           </a:prstGeom>
           <a:solidFill>
-            <a:srgbClr val="FAEEC6"/>
+            <a:srgbClr val="D1FADC"/>
           </a:solidFill>
           <a:ln>
             <a:noFill/>
@@ -3984,7 +3984,7 @@
             <a:avLst/>
           </a:prstGeom>
           <a:solidFill>
-            <a:srgbClr val="CAA016"/>
+            <a:srgbClr val="26C54E"/>
           </a:solidFill>
           <a:ln w="38100">
             <a:solidFill>
@@ -4030,7 +4030,7 @@
             <a:r>
               <a:rPr sz="1600" b="1" i="0">
                 <a:solidFill>
-                  <a:srgbClr val="CAA016"/>
+                  <a:srgbClr val="26C54E"/>
                 </a:solidFill>
               </a:rPr>
               <a:t>처음 만난 날</a:t>
@@ -4068,7 +4068,7 @@
             <a:r>
               <a:rPr sz="1800" b="1" i="0">
                 <a:solidFill>
-                  <a:srgbClr val="6E570C"/>
+                  <a:srgbClr val="115F25"/>
                 </a:solidFill>
               </a:rPr>
               <a:t>첫 만남</a:t>
@@ -4129,7 +4129,7 @@
             <a:avLst/>
           </a:prstGeom>
           <a:solidFill>
-            <a:srgbClr val="CAA016"/>
+            <a:srgbClr val="26C54E"/>
           </a:solidFill>
           <a:ln w="38100">
             <a:solidFill>
@@ -4175,7 +4175,7 @@
             <a:r>
               <a:rPr sz="1600" b="1" i="0">
                 <a:solidFill>
-                  <a:srgbClr val="CAA016"/>
+                  <a:srgbClr val="26C54E"/>
                 </a:solidFill>
               </a:rPr>
               <a:t>첫 데이트</a:t>
@@ -4213,7 +4213,7 @@
             <a:r>
               <a:rPr sz="1800" b="1" i="0">
                 <a:solidFill>
-                  <a:srgbClr val="6E570C"/>
+                  <a:srgbClr val="115F25"/>
                 </a:solidFill>
               </a:rPr>
               <a:t>설레던 하루</a:t>
@@ -4274,7 +4274,7 @@
             <a:avLst/>
           </a:prstGeom>
           <a:solidFill>
-            <a:srgbClr val="CAA016"/>
+            <a:srgbClr val="26C54E"/>
           </a:solidFill>
           <a:ln w="38100">
             <a:solidFill>
@@ -4320,7 +4320,7 @@
             <a:r>
               <a:rPr sz="1600" b="1" i="0">
                 <a:solidFill>
-                  <a:srgbClr val="CAA016"/>
+                  <a:srgbClr val="26C54E"/>
                 </a:solidFill>
               </a:rPr>
               <a:t>프러포즈</a:t>
@@ -4358,7 +4358,7 @@
             <a:r>
               <a:rPr sz="1800" b="1" i="0">
                 <a:solidFill>
-                  <a:srgbClr val="6E570C"/>
+                  <a:srgbClr val="115F25"/>
                 </a:solidFill>
               </a:rPr>
               <a:t>평생을 약속하다</a:t>
@@ -4419,7 +4419,7 @@
             <a:avLst/>
           </a:prstGeom>
           <a:solidFill>
-            <a:srgbClr val="CAA016"/>
+            <a:srgbClr val="26C54E"/>
           </a:solidFill>
           <a:ln w="38100">
             <a:solidFill>
@@ -4465,7 +4465,7 @@
             <a:r>
               <a:rPr sz="1600" b="1" i="0">
                 <a:solidFill>
-                  <a:srgbClr val="CAA016"/>
+                  <a:srgbClr val="26C54E"/>
                 </a:solidFill>
               </a:rPr>
               <a:t>결혼</a:t>
@@ -4503,7 +4503,7 @@
             <a:r>
               <a:rPr sz="1800" b="1" i="0">
                 <a:solidFill>
-                  <a:srgbClr val="6E570C"/>
+                  <a:srgbClr val="115F25"/>
                 </a:solidFill>
               </a:rPr>
               <a:t>오늘의 우리</a:t>
@@ -4563,7 +4563,7 @@
     <p:bg>
       <p:bgPr>
         <a:solidFill>
-          <a:srgbClr val="CAA016"/>
+          <a:srgbClr val="26C54E"/>
         </a:solidFill>
         <a:effectLst/>
       </p:bgPr>
@@ -4636,7 +4636,7 @@
             <a:r>
               <a:rPr sz="3000" b="1" i="0">
                 <a:solidFill>
-                  <a:srgbClr val="6E570C"/>
+                  <a:srgbClr val="115F25"/>
                 </a:solidFill>
               </a:rPr>
               <a:t>우리의 첫 번째</a:t>
@@ -4661,11 +4661,11 @@
             </a:avLst>
           </a:prstGeom>
           <a:solidFill>
-            <a:srgbClr val="FDF9ED"/>
+            <a:srgbClr val="EEFCF1"/>
           </a:solidFill>
           <a:ln w="15875">
             <a:solidFill>
-              <a:srgbClr val="FAEEC6"/>
+              <a:srgbClr val="D1FADC"/>
             </a:solidFill>
           </a:ln>
         </p:spPr>
@@ -4692,7 +4692,7 @@
             <a:avLst/>
           </a:prstGeom>
           <a:solidFill>
-            <a:srgbClr val="CAA016"/>
+            <a:srgbClr val="26C54E"/>
           </a:solidFill>
           <a:ln>
             <a:noFill/>
@@ -4750,7 +4750,7 @@
             <a:r>
               <a:rPr sz="1800" b="1" i="0">
                 <a:solidFill>
-                  <a:srgbClr val="6E570C"/>
+                  <a:srgbClr val="115F25"/>
                 </a:solidFill>
               </a:rPr>
               <a:t>첫 여행</a:t>
@@ -4813,11 +4813,11 @@
             </a:avLst>
           </a:prstGeom>
           <a:solidFill>
-            <a:srgbClr val="FDF9ED"/>
+            <a:srgbClr val="EEFCF1"/>
           </a:solidFill>
           <a:ln w="15875">
             <a:solidFill>
-              <a:srgbClr val="FAEEC6"/>
+              <a:srgbClr val="D1FADC"/>
             </a:solidFill>
           </a:ln>
         </p:spPr>
@@ -4844,7 +4844,7 @@
             <a:avLst/>
           </a:prstGeom>
           <a:solidFill>
-            <a:srgbClr val="CAA016"/>
+            <a:srgbClr val="26C54E"/>
           </a:solidFill>
           <a:ln>
             <a:noFill/>
@@ -4902,7 +4902,7 @@
             <a:r>
               <a:rPr sz="1800" b="1" i="0">
                 <a:solidFill>
-                  <a:srgbClr val="6E570C"/>
+                  <a:srgbClr val="115F25"/>
                 </a:solidFill>
               </a:rPr>
               <a:t>첫 선물</a:t>
@@ -4965,11 +4965,11 @@
             </a:avLst>
           </a:prstGeom>
           <a:solidFill>
-            <a:srgbClr val="FDF9ED"/>
+            <a:srgbClr val="EEFCF1"/>
           </a:solidFill>
           <a:ln w="15875">
             <a:solidFill>
-              <a:srgbClr val="FAEEC6"/>
+              <a:srgbClr val="D1FADC"/>
             </a:solidFill>
           </a:ln>
         </p:spPr>
@@ -4996,7 +4996,7 @@
             <a:avLst/>
           </a:prstGeom>
           <a:solidFill>
-            <a:srgbClr val="CAA016"/>
+            <a:srgbClr val="26C54E"/>
           </a:solidFill>
           <a:ln>
             <a:noFill/>
@@ -5054,7 +5054,7 @@
             <a:r>
               <a:rPr sz="1800" b="1" i="0">
                 <a:solidFill>
-                  <a:srgbClr val="6E570C"/>
+                  <a:srgbClr val="115F25"/>
                 </a:solidFill>
               </a:rPr>
               <a:t>첫 다툼</a:t>
@@ -5117,11 +5117,11 @@
             </a:avLst>
           </a:prstGeom>
           <a:solidFill>
-            <a:srgbClr val="FDF9ED"/>
+            <a:srgbClr val="EEFCF1"/>
           </a:solidFill>
           <a:ln w="15875">
             <a:solidFill>
-              <a:srgbClr val="FAEEC6"/>
+              <a:srgbClr val="D1FADC"/>
             </a:solidFill>
           </a:ln>
         </p:spPr>
@@ -5148,7 +5148,7 @@
             <a:avLst/>
           </a:prstGeom>
           <a:solidFill>
-            <a:srgbClr val="CAA016"/>
+            <a:srgbClr val="26C54E"/>
           </a:solidFill>
           <a:ln>
             <a:noFill/>
@@ -5206,7 +5206,7 @@
             <a:r>
               <a:rPr sz="1800" b="1" i="0">
                 <a:solidFill>
-                  <a:srgbClr val="6E570C"/>
+                  <a:srgbClr val="115F25"/>
                 </a:solidFill>
               </a:rPr>
               <a:t>첫 약속</a:t>
@@ -5266,7 +5266,7 @@
     <p:bg>
       <p:bgPr>
         <a:solidFill>
-          <a:srgbClr val="CAA016"/>
+          <a:srgbClr val="26C54E"/>
         </a:solidFill>
         <a:effectLst/>
       </p:bgPr>
@@ -5339,7 +5339,7 @@
             <a:r>
               <a:rPr sz="3000" b="1" i="0">
                 <a:solidFill>
-                  <a:srgbClr val="6E570C"/>
+                  <a:srgbClr val="115F25"/>
                 </a:solidFill>
               </a:rPr>
               <a:t>웨딩 사진</a:t>
@@ -5364,11 +5364,11 @@
             </a:avLst>
           </a:prstGeom>
           <a:solidFill>
-            <a:srgbClr val="FAEEC6"/>
+            <a:srgbClr val="D1FADC"/>
           </a:solidFill>
           <a:ln w="19050">
             <a:solidFill>
-              <a:srgbClr val="CAA016"/>
+              <a:srgbClr val="26C54E"/>
             </a:solidFill>
             <a:prstDash val="dash"/>
           </a:ln>
@@ -5387,7 +5387,7 @@
             <a:r>
               <a:rPr sz="1200" b="0" i="0">
                 <a:solidFill>
-                  <a:srgbClr val="6E570C"/>
+                  <a:srgbClr val="115F25"/>
                 </a:solidFill>
               </a:rPr>
               <a:t>사진 1</a:t>
@@ -5412,11 +5412,11 @@
             </a:avLst>
           </a:prstGeom>
           <a:solidFill>
-            <a:srgbClr val="FAEEC6"/>
+            <a:srgbClr val="D1FADC"/>
           </a:solidFill>
           <a:ln w="19050">
             <a:solidFill>
-              <a:srgbClr val="CAA016"/>
+              <a:srgbClr val="26C54E"/>
             </a:solidFill>
             <a:prstDash val="dash"/>
           </a:ln>
@@ -5435,7 +5435,7 @@
             <a:r>
               <a:rPr sz="1200" b="0" i="0">
                 <a:solidFill>
-                  <a:srgbClr val="6E570C"/>
+                  <a:srgbClr val="115F25"/>
                 </a:solidFill>
               </a:rPr>
               <a:t>사진 2</a:t>
@@ -5460,11 +5460,11 @@
             </a:avLst>
           </a:prstGeom>
           <a:solidFill>
-            <a:srgbClr val="FAEEC6"/>
+            <a:srgbClr val="D1FADC"/>
           </a:solidFill>
           <a:ln w="19050">
             <a:solidFill>
-              <a:srgbClr val="CAA016"/>
+              <a:srgbClr val="26C54E"/>
             </a:solidFill>
             <a:prstDash val="dash"/>
           </a:ln>
@@ -5483,7 +5483,7 @@
             <a:r>
               <a:rPr sz="1200" b="0" i="0">
                 <a:solidFill>
-                  <a:srgbClr val="6E570C"/>
+                  <a:srgbClr val="115F25"/>
                 </a:solidFill>
               </a:rPr>
               <a:t>사진 3</a:t>
@@ -5508,11 +5508,11 @@
             </a:avLst>
           </a:prstGeom>
           <a:solidFill>
-            <a:srgbClr val="FAEEC6"/>
+            <a:srgbClr val="D1FADC"/>
           </a:solidFill>
           <a:ln w="19050">
             <a:solidFill>
-              <a:srgbClr val="CAA016"/>
+              <a:srgbClr val="26C54E"/>
             </a:solidFill>
             <a:prstDash val="dash"/>
           </a:ln>
@@ -5531,7 +5531,7 @@
             <a:r>
               <a:rPr sz="1200" b="0" i="0">
                 <a:solidFill>
-                  <a:srgbClr val="6E570C"/>
+                  <a:srgbClr val="115F25"/>
                 </a:solidFill>
               </a:rPr>
               <a:t>사진 4</a:t>
@@ -5556,11 +5556,11 @@
             </a:avLst>
           </a:prstGeom>
           <a:solidFill>
-            <a:srgbClr val="FAEEC6"/>
+            <a:srgbClr val="D1FADC"/>
           </a:solidFill>
           <a:ln w="19050">
             <a:solidFill>
-              <a:srgbClr val="CAA016"/>
+              <a:srgbClr val="26C54E"/>
             </a:solidFill>
             <a:prstDash val="dash"/>
           </a:ln>
@@ -5579,7 +5579,7 @@
             <a:r>
               <a:rPr sz="1200" b="0" i="0">
                 <a:solidFill>
-                  <a:srgbClr val="6E570C"/>
+                  <a:srgbClr val="115F25"/>
                 </a:solidFill>
               </a:rPr>
               <a:t>사진 5</a:t>
@@ -5604,11 +5604,11 @@
             </a:avLst>
           </a:prstGeom>
           <a:solidFill>
-            <a:srgbClr val="FAEEC6"/>
+            <a:srgbClr val="D1FADC"/>
           </a:solidFill>
           <a:ln w="19050">
             <a:solidFill>
-              <a:srgbClr val="CAA016"/>
+              <a:srgbClr val="26C54E"/>
             </a:solidFill>
             <a:prstDash val="dash"/>
           </a:ln>
@@ -5627,7 +5627,7 @@
             <a:r>
               <a:rPr sz="1200" b="0" i="0">
                 <a:solidFill>
-                  <a:srgbClr val="6E570C"/>
+                  <a:srgbClr val="115F25"/>
                 </a:solidFill>
               </a:rPr>
               <a:t>사진 6</a:t>
@@ -5707,7 +5707,7 @@
             <a:r>
               <a:rPr sz="3400" b="1" i="0">
                 <a:solidFill>
-                  <a:srgbClr val="6E570C"/>
+                  <a:srgbClr val="115F25"/>
                 </a:solidFill>
               </a:rPr>
               <a:t>와 주셔서 고맙습니다</a:t>
@@ -5745,7 +5745,7 @@
             <a:r>
               <a:rPr sz="1700" b="0" i="1">
                 <a:solidFill>
-                  <a:srgbClr val="6E570C"/>
+                  <a:srgbClr val="115F25"/>
                 </a:solidFill>
               </a:rPr>
               <a:t>잘 살겠습니다</a:t>
@@ -5810,34 +5810,34 @@
         <a:sysClr val="window" lastClr="FFFFFF"/>
       </a:lt1>
       <a:dk2>
-        <a:srgbClr val="6E570C"/>
+        <a:srgbClr val="115F25"/>
       </a:dk2>
       <a:lt2>
-        <a:srgbClr val="FDF9ED"/>
+        <a:srgbClr val="EEFCF1"/>
       </a:lt2>
       <a:accent1>
-        <a:srgbClr val="CAA016"/>
+        <a:srgbClr val="26C54E"/>
       </a:accent1>
       <a:accent2>
-        <a:srgbClr val="3B7A91"/>
+        <a:srgbClr val="209DB6"/>
       </a:accent2>
       <a:accent3>
-        <a:srgbClr val="6E570C"/>
+        <a:srgbClr val="115F25"/>
       </a:accent3>
       <a:accent4>
-        <a:srgbClr val="FAEEC6"/>
+        <a:srgbClr val="D1FADC"/>
       </a:accent4>
       <a:accent5>
-        <a:srgbClr val="828D54"/>
+        <a:srgbClr val="23B182"/>
       </a:accent5>
       <a:accent6>
-        <a:srgbClr val="A89A6D"/>
+        <a:srgbClr val="709F7C"/>
       </a:accent6>
       <a:hlink>
-        <a:srgbClr val="CAA016"/>
+        <a:srgbClr val="26C54E"/>
       </a:hlink>
       <a:folHlink>
-        <a:srgbClr val="6E570C"/>
+        <a:srgbClr val="115F25"/>
       </a:folHlink>
     </a:clrScheme>
     <a:fontScheme name="Office">

--- a/public/fun/pack/pptx/wedding/결혼식_17_러브스토리중심_해바라기담장.pptx
+++ b/public/fun/pack/pptx/wedding/결혼식_17_러브스토리중심_해바라기담장.pptx
@@ -3286,6 +3286,14 @@
 <file path=ppt/slides/slide1.xml><?xml version="1.0" encoding="utf-8"?>
 <p:sld xmlns:a="http://schemas.openxmlformats.org/drawingml/2006/main" xmlns:p="http://schemas.openxmlformats.org/presentationml/2006/main" xmlns:r="http://schemas.openxmlformats.org/officeDocument/2006/relationships">
   <p:cSld>
+    <p:bg>
+      <p:bgPr>
+        <a:solidFill>
+          <a:srgbClr val="FDF8EA"/>
+        </a:solidFill>
+        <a:effectLst/>
+      </p:bgPr>
+    </p:bg>
     <p:spTree>
       <p:nvGrpSpPr>
         <p:cNvPr id="1" name=""/>
@@ -3293,30 +3301,116 @@
         <p:nvPr/>
       </p:nvGrpSpPr>
       <p:grpSpPr/>
-      <p:pic>
-        <p:nvPicPr>
-          <p:cNvPr id="3" name="표지 그림" descr="wedding-17.jpg"/>
-          <p:cNvPicPr>
-            <a:picLocks noChangeAspect="1"/>
-          </p:cNvPicPr>
-          <p:nvPr/>
-        </p:nvPicPr>
-        <p:blipFill>
-          <a:blip r:embed="rId2"/>
-          <a:stretch>
-            <a:fillRect/>
-          </a:stretch>
-        </p:blipFill>
+      <p:sp>
+        <p:nvSpPr>
+          <p:cNvPr id="3" name="사진 자리"/>
+          <p:cNvSpPr/>
+          <p:nvPr/>
+        </p:nvSpPr>
         <p:spPr>
           <a:xfrm>
             <a:off x="0" y="0"/>
-            <a:ext cx="12191695" cy="6858000"/>
+            <a:ext cx="4389010" cy="6858000"/>
           </a:xfrm>
           <a:prstGeom prst="rect">
             <a:avLst/>
           </a:prstGeom>
-        </p:spPr>
-      </p:pic>
+          <a:solidFill>
+            <a:srgbClr val="F3E1A5"/>
+          </a:solidFill>
+          <a:ln>
+            <a:noFill/>
+          </a:ln>
+        </p:spPr>
+        <p:txBody>
+          <a:bodyPr rtlCol="0" anchor="ctr" wrap="square" lIns="54864" rIns="54864" tIns="27432" bIns="27432">
+            <a:noAutofit/>
+          </a:bodyPr>
+          <a:lstStyle/>
+          <a:p>
+            <a:pPr algn="ctr">
+              <a:lnSpc>
+                <a:spcPct val="100000"/>
+              </a:lnSpc>
+            </a:pPr>
+            <a:r>
+              <a:rPr sz="1400" b="0" i="0">
+                <a:solidFill>
+                  <a:srgbClr val="494127"/>
+                </a:solidFill>
+              </a:rPr>
+              <a:t>사진을 넣어 주세요</a:t>
+            </a:r>
+          </a:p>
+        </p:txBody>
+      </p:sp>
+      <p:sp>
+        <p:nvSpPr>
+          <p:cNvPr id="4" name="장식"/>
+          <p:cNvSpPr/>
+          <p:nvPr/>
+        </p:nvSpPr>
+        <p:spPr>
+          <a:xfrm>
+            <a:off x="365750" y="365760"/>
+            <a:ext cx="3657508" cy="6126480"/>
+          </a:xfrm>
+          <a:prstGeom prst="rect">
+            <a:avLst/>
+          </a:prstGeom>
+          <a:noFill/>
+          <a:ln w="9525">
+            <a:solidFill>
+              <a:srgbClr val="26231F"/>
+            </a:solidFill>
+          </a:ln>
+        </p:spPr>
+        <p:txBody>
+          <a:bodyPr rtlCol="0" anchor="ctr"/>
+          <a:lstStyle/>
+          <a:p>
+            <a:pPr algn="ctr"/>
+          </a:p>
+        </p:txBody>
+      </p:sp>
+      <p:sp>
+        <p:nvSpPr>
+          <p:cNvPr id="5" name="라벨"/>
+          <p:cNvSpPr txBox="1"/>
+          <p:nvPr/>
+        </p:nvSpPr>
+        <p:spPr>
+          <a:xfrm>
+            <a:off x="6827349" y="2148840"/>
+            <a:ext cx="4632844" cy="274320"/>
+          </a:xfrm>
+          <a:prstGeom prst="rect">
+            <a:avLst/>
+          </a:prstGeom>
+          <a:noFill/>
+        </p:spPr>
+        <p:txBody>
+          <a:bodyPr wrap="square" lIns="54864" rIns="54864" tIns="27432" bIns="27432" anchor="t">
+            <a:noAutofit/>
+          </a:bodyPr>
+          <a:lstStyle/>
+          <a:p>
+            <a:pPr algn="l">
+              <a:lnSpc>
+                <a:spcPct val="115000"/>
+              </a:lnSpc>
+            </a:pPr>
+            <a:r>
+              <a:rPr sz="1000" b="1" i="0" spc="250">
+                <a:solidFill>
+                  <a:srgbClr val="26231F"/>
+                </a:solidFill>
+              </a:rPr>
+              <a:t>WEDDING</a:t>
+            </a:r>
+          </a:p>
+        </p:txBody>
+      </p:sp>
       <p:sp>
         <p:nvSpPr>
           <p:cNvPr id="2" name="Title 1"/>
@@ -3329,8 +3423,8 @@
         </p:nvSpPr>
         <p:spPr>
           <a:xfrm>
-            <a:off x="853418" y="2057400"/>
-            <a:ext cx="6095847" cy="1554480"/>
+            <a:off x="6827349" y="2606040"/>
+            <a:ext cx="4632844" cy="1188720"/>
           </a:xfrm>
         </p:spPr>
         <p:txBody>
@@ -3347,7 +3441,7 @@
             <a:r>
               <a:rPr sz="3600" b="1" i="0">
                 <a:solidFill>
-                  <a:srgbClr val="115F25"/>
+                  <a:srgbClr val="26231F"/>
                 </a:solidFill>
               </a:rPr>
               <a:t>저희 결혼합니다</a:t>
@@ -3357,14 +3451,14 @@
       </p:sp>
       <p:sp>
         <p:nvSpPr>
-          <p:cNvPr id="4" name="한 줄 문구"/>
+          <p:cNvPr id="6" name="한 줄 문구"/>
           <p:cNvSpPr txBox="1"/>
           <p:nvPr/>
         </p:nvSpPr>
         <p:spPr>
           <a:xfrm>
-            <a:off x="853418" y="3749039"/>
-            <a:ext cx="6095847" cy="822960"/>
+            <a:off x="6827349" y="3886200"/>
+            <a:ext cx="4632844" cy="822960"/>
           </a:xfrm>
           <a:prstGeom prst="rect">
             <a:avLst/>
@@ -3383,9 +3477,9 @@
               </a:lnSpc>
             </a:pPr>
             <a:r>
-              <a:rPr sz="1700" b="0" i="1">
-                <a:solidFill>
-                  <a:srgbClr val="115F25"/>
+              <a:rPr sz="1700" b="0" i="0">
+                <a:solidFill>
+                  <a:srgbClr val="26231F"/>
                 </a:solidFill>
               </a:rPr>
               <a:t>싸우기도 많이 했고, 그만큼 풀기도 했습니다</a:t>
@@ -3395,14 +3489,14 @@
       </p:sp>
       <p:sp>
         <p:nvSpPr>
-          <p:cNvPr id="5" name="안내 문구"/>
+          <p:cNvPr id="7" name="안내 문구"/>
           <p:cNvSpPr txBox="1"/>
           <p:nvPr/>
         </p:nvSpPr>
         <p:spPr>
           <a:xfrm>
-            <a:off x="853418" y="4617720"/>
-            <a:ext cx="6095847" cy="914400"/>
+            <a:off x="6827349" y="4754880"/>
+            <a:ext cx="4632844" cy="914400"/>
           </a:xfrm>
           <a:prstGeom prst="rect">
             <a:avLst/>
@@ -3423,7 +3517,7 @@
             <a:r>
               <a:rPr sz="1400" b="0" i="0">
                 <a:solidFill>
-                  <a:srgbClr val="666666"/>
+                  <a:srgbClr val="26231F"/>
                 </a:solidFill>
               </a:rPr>
               <a:t>신랑 이름 ♥ 신부 이름</a:t>
@@ -3438,10 +3532,10 @@
             <a:r>
               <a:rPr sz="1400" b="0" i="0">
                 <a:solidFill>
-                  <a:srgbClr val="666666"/>
+                  <a:srgbClr val="26231F"/>
                 </a:solidFill>
               </a:rPr>
-              <a:t>2027. 00. 00 · 예식장 이름</a:t>
+              <a:t>날짜 입력 · 예식장 이름</a:t>
             </a:r>
           </a:p>
         </p:txBody>
@@ -3460,7 +3554,7 @@
     <p:bg>
       <p:bgPr>
         <a:solidFill>
-          <a:srgbClr val="26C54E"/>
+          <a:srgbClr val="FFFFFF"/>
         </a:solidFill>
         <a:effectLst/>
       </p:bgPr>
@@ -3480,16 +3574,14 @@
         </p:nvSpPr>
         <p:spPr>
           <a:xfrm>
-            <a:off x="274320" y="274320"/>
-            <a:ext cx="11643055" cy="6309360"/>
-          </a:xfrm>
-          <a:prstGeom prst="roundRect">
-            <a:avLst>
-              <a:gd name="adj" fmla="val 3500"/>
-            </a:avLst>
+            <a:off x="640080" y="566928"/>
+            <a:ext cx="10911535" cy="10972"/>
+          </a:xfrm>
+          <a:prstGeom prst="rect">
+            <a:avLst/>
           </a:prstGeom>
           <a:solidFill>
-            <a:srgbClr val="FFFFFF"/>
+            <a:srgbClr val="26231F"/>
           </a:solidFill>
           <a:ln>
             <a:noFill/>
@@ -3505,6 +3597,73 @@
       </p:sp>
       <p:sp>
         <p:nvSpPr>
+          <p:cNvPr id="4" name="상단 라벨"/>
+          <p:cNvSpPr txBox="1"/>
+          <p:nvPr/>
+        </p:nvSpPr>
+        <p:spPr>
+          <a:xfrm>
+            <a:off x="640080" y="237744"/>
+            <a:ext cx="5486400" cy="274320"/>
+          </a:xfrm>
+          <a:prstGeom prst="rect">
+            <a:avLst/>
+          </a:prstGeom>
+          <a:noFill/>
+        </p:spPr>
+        <p:txBody>
+          <a:bodyPr wrap="square" lIns="54864" rIns="54864" tIns="27432" bIns="27432" anchor="ctr">
+            <a:noAutofit/>
+          </a:bodyPr>
+          <a:lstStyle/>
+          <a:p>
+            <a:pPr algn="l">
+              <a:lnSpc>
+                <a:spcPct val="115000"/>
+              </a:lnSpc>
+            </a:pPr>
+            <a:r>
+              <a:rPr sz="900" b="1" i="0" spc="250">
+                <a:solidFill>
+                  <a:srgbClr val="26231F"/>
+                </a:solidFill>
+              </a:rPr>
+              <a:t>WEDDING</a:t>
+            </a:r>
+          </a:p>
+        </p:txBody>
+      </p:sp>
+      <p:sp>
+        <p:nvSpPr>
+          <p:cNvPr id="5" name="포인트"/>
+          <p:cNvSpPr/>
+          <p:nvPr/>
+        </p:nvSpPr>
+        <p:spPr>
+          <a:xfrm>
+            <a:off x="11204143" y="246888"/>
+            <a:ext cx="237744" cy="237744"/>
+          </a:xfrm>
+          <a:prstGeom prst="moon">
+            <a:avLst/>
+          </a:prstGeom>
+          <a:solidFill>
+            <a:srgbClr val="EAD07B"/>
+          </a:solidFill>
+          <a:ln>
+            <a:noFill/>
+          </a:ln>
+        </p:spPr>
+        <p:txBody>
+          <a:bodyPr rtlCol="0" anchor="ctr"/>
+          <a:lstStyle/>
+          <a:p>
+            <a:pPr algn="ctr"/>
+          </a:p>
+        </p:txBody>
+      </p:sp>
+      <p:sp>
+        <p:nvSpPr>
           <p:cNvPr id="2" name="Title 1"/>
           <p:cNvSpPr>
             <a:spLocks noGrp="1"/>
@@ -3515,8 +3674,8 @@
         </p:nvSpPr>
         <p:spPr>
           <a:xfrm>
-            <a:off x="731520" y="548640"/>
-            <a:ext cx="9448495" cy="868680"/>
+            <a:off x="640080" y="731520"/>
+            <a:ext cx="10911535" cy="822960"/>
           </a:xfrm>
         </p:spPr>
         <p:txBody>
@@ -3533,7 +3692,7 @@
             <a:r>
               <a:rPr sz="3000" b="1" i="0">
                 <a:solidFill>
-                  <a:srgbClr val="115F25"/>
+                  <a:srgbClr val="26231F"/>
                 </a:solidFill>
               </a:rPr>
               <a:t>신랑 · 신부 소개</a:t>
@@ -3543,25 +3702,23 @@
       </p:sp>
       <p:sp>
         <p:nvSpPr>
-          <p:cNvPr id="4" name="사진 자리"/>
+          <p:cNvPr id="6" name="사진 자리"/>
           <p:cNvSpPr/>
           <p:nvPr/>
         </p:nvSpPr>
         <p:spPr>
           <a:xfrm>
-            <a:off x="2030653" y="1600200"/>
-            <a:ext cx="2308860" cy="2308860"/>
+            <a:off x="1996363" y="1783080"/>
+            <a:ext cx="2286000" cy="2286000"/>
           </a:xfrm>
           <a:prstGeom prst="ellipse">
             <a:avLst/>
           </a:prstGeom>
           <a:solidFill>
-            <a:srgbClr val="D1FADC"/>
+            <a:srgbClr val="FAF1D1"/>
           </a:solidFill>
           <a:ln w="19050">
-            <a:solidFill>
-              <a:srgbClr val="26C54E"/>
-            </a:solidFill>
+            <a:noFill/>
             <a:prstDash val="dash"/>
           </a:ln>
         </p:spPr>
@@ -3579,7 +3736,7 @@
             <a:r>
               <a:rPr sz="1200" b="0" i="0">
                 <a:solidFill>
-                  <a:srgbClr val="115F25"/>
+                  <a:srgbClr val="8E8780"/>
                 </a:solidFill>
               </a:rPr>
               <a:t>사진</a:t>
@@ -3589,14 +3746,14 @@
       </p:sp>
       <p:sp>
         <p:nvSpPr>
-          <p:cNvPr id="5" name="TextBox 4"/>
+          <p:cNvPr id="7" name="TextBox 6"/>
           <p:cNvSpPr txBox="1"/>
           <p:nvPr/>
         </p:nvSpPr>
         <p:spPr>
           <a:xfrm>
-            <a:off x="731520" y="4000500"/>
-            <a:ext cx="4907127" cy="411480"/>
+            <a:off x="640080" y="4160520"/>
+            <a:ext cx="4998567" cy="411480"/>
           </a:xfrm>
           <a:prstGeom prst="rect">
             <a:avLst/>
@@ -3617,7 +3774,7 @@
             <a:r>
               <a:rPr sz="1600" b="1" i="0">
                 <a:solidFill>
-                  <a:srgbClr val="115F25"/>
+                  <a:srgbClr val="494127"/>
                 </a:solidFill>
               </a:rPr>
               <a:t>신랑</a:t>
@@ -3627,14 +3784,14 @@
       </p:sp>
       <p:sp>
         <p:nvSpPr>
-          <p:cNvPr id="6" name="TextBox 5"/>
+          <p:cNvPr id="8" name="TextBox 7"/>
           <p:cNvSpPr txBox="1"/>
           <p:nvPr/>
         </p:nvSpPr>
         <p:spPr>
           <a:xfrm>
-            <a:off x="822960" y="4457700"/>
-            <a:ext cx="4724247" cy="1760219"/>
+            <a:off x="731519" y="4617720"/>
+            <a:ext cx="4815687" cy="1737360"/>
           </a:xfrm>
           <a:prstGeom prst="rect">
             <a:avLst/>
@@ -3695,25 +3852,23 @@
       </p:sp>
       <p:sp>
         <p:nvSpPr>
-          <p:cNvPr id="7" name="사진 자리"/>
+          <p:cNvPr id="9" name="사진 자리"/>
           <p:cNvSpPr/>
           <p:nvPr/>
         </p:nvSpPr>
         <p:spPr>
           <a:xfrm>
-            <a:off x="7852181" y="1600200"/>
-            <a:ext cx="2308860" cy="2308860"/>
+            <a:off x="7909331" y="1783080"/>
+            <a:ext cx="2286000" cy="2286000"/>
           </a:xfrm>
           <a:prstGeom prst="ellipse">
             <a:avLst/>
           </a:prstGeom>
           <a:solidFill>
-            <a:srgbClr val="D1FADC"/>
+            <a:srgbClr val="FAF1D1"/>
           </a:solidFill>
           <a:ln w="19050">
-            <a:solidFill>
-              <a:srgbClr val="26C54E"/>
-            </a:solidFill>
+            <a:noFill/>
             <a:prstDash val="dash"/>
           </a:ln>
         </p:spPr>
@@ -3731,7 +3886,7 @@
             <a:r>
               <a:rPr sz="1200" b="0" i="0">
                 <a:solidFill>
-                  <a:srgbClr val="115F25"/>
+                  <a:srgbClr val="8E8780"/>
                 </a:solidFill>
               </a:rPr>
               <a:t>사진</a:t>
@@ -3741,14 +3896,14 @@
       </p:sp>
       <p:sp>
         <p:nvSpPr>
-          <p:cNvPr id="8" name="TextBox 7"/>
+          <p:cNvPr id="10" name="TextBox 9"/>
           <p:cNvSpPr txBox="1"/>
           <p:nvPr/>
         </p:nvSpPr>
         <p:spPr>
           <a:xfrm>
-            <a:off x="6553047" y="4000500"/>
-            <a:ext cx="4907127" cy="411480"/>
+            <a:off x="6553047" y="4160520"/>
+            <a:ext cx="4998567" cy="411480"/>
           </a:xfrm>
           <a:prstGeom prst="rect">
             <a:avLst/>
@@ -3769,7 +3924,7 @@
             <a:r>
               <a:rPr sz="1600" b="1" i="0">
                 <a:solidFill>
-                  <a:srgbClr val="115F25"/>
+                  <a:srgbClr val="494127"/>
                 </a:solidFill>
               </a:rPr>
               <a:t>신부</a:t>
@@ -3779,14 +3934,14 @@
       </p:sp>
       <p:sp>
         <p:nvSpPr>
-          <p:cNvPr id="9" name="TextBox 8"/>
+          <p:cNvPr id="11" name="TextBox 10"/>
           <p:cNvSpPr txBox="1"/>
           <p:nvPr/>
         </p:nvSpPr>
         <p:spPr>
           <a:xfrm>
-            <a:off x="6644487" y="4457700"/>
-            <a:ext cx="4724247" cy="1760219"/>
+            <a:off x="6644487" y="4617720"/>
+            <a:ext cx="4815687" cy="1737360"/>
           </a:xfrm>
           <a:prstGeom prst="rect">
             <a:avLst/>
@@ -3859,7 +4014,7 @@
     <p:bg>
       <p:bgPr>
         <a:solidFill>
-          <a:srgbClr val="26C54E"/>
+          <a:srgbClr val="FFFFFF"/>
         </a:solidFill>
         <a:effectLst/>
       </p:bgPr>
@@ -3879,16 +4034,14 @@
         </p:nvSpPr>
         <p:spPr>
           <a:xfrm>
-            <a:off x="274320" y="274320"/>
-            <a:ext cx="11643055" cy="6309360"/>
-          </a:xfrm>
-          <a:prstGeom prst="roundRect">
-            <a:avLst>
-              <a:gd name="adj" fmla="val 3500"/>
-            </a:avLst>
+            <a:off x="640080" y="566928"/>
+            <a:ext cx="10911535" cy="10972"/>
+          </a:xfrm>
+          <a:prstGeom prst="rect">
+            <a:avLst/>
           </a:prstGeom>
           <a:solidFill>
-            <a:srgbClr val="FFFFFF"/>
+            <a:srgbClr val="26231F"/>
           </a:solidFill>
           <a:ln>
             <a:noFill/>
@@ -3904,6 +4057,73 @@
       </p:sp>
       <p:sp>
         <p:nvSpPr>
+          <p:cNvPr id="4" name="상단 라벨"/>
+          <p:cNvSpPr txBox="1"/>
+          <p:nvPr/>
+        </p:nvSpPr>
+        <p:spPr>
+          <a:xfrm>
+            <a:off x="640080" y="237744"/>
+            <a:ext cx="5486400" cy="274320"/>
+          </a:xfrm>
+          <a:prstGeom prst="rect">
+            <a:avLst/>
+          </a:prstGeom>
+          <a:noFill/>
+        </p:spPr>
+        <p:txBody>
+          <a:bodyPr wrap="square" lIns="54864" rIns="54864" tIns="27432" bIns="27432" anchor="ctr">
+            <a:noAutofit/>
+          </a:bodyPr>
+          <a:lstStyle/>
+          <a:p>
+            <a:pPr algn="l">
+              <a:lnSpc>
+                <a:spcPct val="115000"/>
+              </a:lnSpc>
+            </a:pPr>
+            <a:r>
+              <a:rPr sz="900" b="1" i="0" spc="250">
+                <a:solidFill>
+                  <a:srgbClr val="26231F"/>
+                </a:solidFill>
+              </a:rPr>
+              <a:t>WEDDING</a:t>
+            </a:r>
+          </a:p>
+        </p:txBody>
+      </p:sp>
+      <p:sp>
+        <p:nvSpPr>
+          <p:cNvPr id="5" name="포인트"/>
+          <p:cNvSpPr/>
+          <p:nvPr/>
+        </p:nvSpPr>
+        <p:spPr>
+          <a:xfrm>
+            <a:off x="11204143" y="246888"/>
+            <a:ext cx="237744" cy="237744"/>
+          </a:xfrm>
+          <a:prstGeom prst="moon">
+            <a:avLst/>
+          </a:prstGeom>
+          <a:solidFill>
+            <a:srgbClr val="EAD07B"/>
+          </a:solidFill>
+          <a:ln>
+            <a:noFill/>
+          </a:ln>
+        </p:spPr>
+        <p:txBody>
+          <a:bodyPr rtlCol="0" anchor="ctr"/>
+          <a:lstStyle/>
+          <a:p>
+            <a:pPr algn="ctr"/>
+          </a:p>
+        </p:txBody>
+      </p:sp>
+      <p:sp>
+        <p:nvSpPr>
           <p:cNvPr id="2" name="Title 1"/>
           <p:cNvSpPr>
             <a:spLocks noGrp="1"/>
@@ -3914,8 +4134,8 @@
         </p:nvSpPr>
         <p:spPr>
           <a:xfrm>
-            <a:off x="731520" y="548640"/>
-            <a:ext cx="9448495" cy="868680"/>
+            <a:off x="640080" y="731520"/>
+            <a:ext cx="10911535" cy="822960"/>
           </a:xfrm>
         </p:spPr>
         <p:txBody>
@@ -3932,7 +4152,7 @@
             <a:r>
               <a:rPr sz="3000" b="1" i="0">
                 <a:solidFill>
-                  <a:srgbClr val="115F25"/>
+                  <a:srgbClr val="26231F"/>
                 </a:solidFill>
               </a:rPr>
               <a:t>우리의 이야기</a:t>
@@ -3942,20 +4162,20 @@
       </p:sp>
       <p:sp>
         <p:nvSpPr>
-          <p:cNvPr id="4" name="타임라인 선"/>
+          <p:cNvPr id="6" name="타임라인 선"/>
           <p:cNvSpPr/>
           <p:nvPr/>
         </p:nvSpPr>
         <p:spPr>
           <a:xfrm>
-            <a:off x="731520" y="3337560"/>
-            <a:ext cx="10728655" cy="54864"/>
+            <a:off x="640080" y="3520440"/>
+            <a:ext cx="10911535" cy="54864"/>
           </a:xfrm>
           <a:prstGeom prst="rect">
             <a:avLst/>
           </a:prstGeom>
           <a:solidFill>
-            <a:srgbClr val="D1FADC"/>
+            <a:srgbClr val="FAF1D1"/>
           </a:solidFill>
           <a:ln>
             <a:noFill/>
@@ -3971,20 +4191,20 @@
       </p:sp>
       <p:sp>
         <p:nvSpPr>
-          <p:cNvPr id="5" name="때 1"/>
+          <p:cNvPr id="7" name="때 1"/>
           <p:cNvSpPr/>
           <p:nvPr/>
         </p:nvSpPr>
         <p:spPr>
           <a:xfrm>
-            <a:off x="1871433" y="3154680"/>
+            <a:off x="1802853" y="3337560"/>
             <a:ext cx="402336" cy="402336"/>
           </a:xfrm>
           <a:prstGeom prst="ellipse">
             <a:avLst/>
           </a:prstGeom>
           <a:solidFill>
-            <a:srgbClr val="26C54E"/>
+            <a:srgbClr val="EAD07B"/>
           </a:solidFill>
           <a:ln w="38100">
             <a:solidFill>
@@ -4002,14 +4222,14 @@
       </p:sp>
       <p:sp>
         <p:nvSpPr>
-          <p:cNvPr id="6" name="TextBox 5"/>
+          <p:cNvPr id="8" name="TextBox 7"/>
           <p:cNvSpPr txBox="1"/>
           <p:nvPr/>
         </p:nvSpPr>
         <p:spPr>
           <a:xfrm>
-            <a:off x="777240" y="2514600"/>
-            <a:ext cx="2590723" cy="457200"/>
+            <a:off x="685800" y="2697480"/>
+            <a:ext cx="2636443" cy="457200"/>
           </a:xfrm>
           <a:prstGeom prst="rect">
             <a:avLst/>
@@ -4030,7 +4250,7 @@
             <a:r>
               <a:rPr sz="1600" b="1" i="0">
                 <a:solidFill>
-                  <a:srgbClr val="26C54E"/>
+                  <a:srgbClr val="EAD07B"/>
                 </a:solidFill>
               </a:rPr>
               <a:t>처음 만난 날</a:t>
@@ -4040,14 +4260,14 @@
       </p:sp>
       <p:sp>
         <p:nvSpPr>
-          <p:cNvPr id="7" name="TextBox 6"/>
+          <p:cNvPr id="9" name="TextBox 8"/>
           <p:cNvSpPr txBox="1"/>
           <p:nvPr/>
         </p:nvSpPr>
         <p:spPr>
           <a:xfrm>
-            <a:off x="822960" y="3703320"/>
-            <a:ext cx="2499283" cy="457200"/>
+            <a:off x="731519" y="3886200"/>
+            <a:ext cx="2545003" cy="457200"/>
           </a:xfrm>
           <a:prstGeom prst="rect">
             <a:avLst/>
@@ -4068,7 +4288,7 @@
             <a:r>
               <a:rPr sz="1800" b="1" i="0">
                 <a:solidFill>
-                  <a:srgbClr val="115F25"/>
+                  <a:srgbClr val="494127"/>
                 </a:solidFill>
               </a:rPr>
               <a:t>첫 만남</a:t>
@@ -4078,14 +4298,14 @@
       </p:sp>
       <p:sp>
         <p:nvSpPr>
-          <p:cNvPr id="8" name="TextBox 7"/>
+          <p:cNvPr id="10" name="TextBox 9"/>
           <p:cNvSpPr txBox="1"/>
           <p:nvPr/>
         </p:nvSpPr>
         <p:spPr>
           <a:xfrm>
-            <a:off x="822960" y="4206240"/>
-            <a:ext cx="2499283" cy="1645920"/>
+            <a:off x="731519" y="4389120"/>
+            <a:ext cx="2545003" cy="1645920"/>
           </a:xfrm>
           <a:prstGeom prst="rect">
             <a:avLst/>
@@ -4106,7 +4326,7 @@
             <a:r>
               <a:rPr sz="1500" b="0" i="0">
                 <a:solidFill>
-                  <a:srgbClr val="2B2B2B"/>
+                  <a:srgbClr val="26231F"/>
                 </a:solidFill>
               </a:rPr>
               <a:t>어디에서 어떻게?</a:t>
@@ -4116,20 +4336,20 @@
       </p:sp>
       <p:sp>
         <p:nvSpPr>
-          <p:cNvPr id="9" name="때 2"/>
+          <p:cNvPr id="11" name="때 2"/>
           <p:cNvSpPr/>
           <p:nvPr/>
         </p:nvSpPr>
         <p:spPr>
           <a:xfrm>
-            <a:off x="4553597" y="3154680"/>
+            <a:off x="4530737" y="3337560"/>
             <a:ext cx="402336" cy="402336"/>
           </a:xfrm>
           <a:prstGeom prst="ellipse">
             <a:avLst/>
           </a:prstGeom>
           <a:solidFill>
-            <a:srgbClr val="26C54E"/>
+            <a:srgbClr val="EAD07B"/>
           </a:solidFill>
           <a:ln w="38100">
             <a:solidFill>
@@ -4147,14 +4367,14 @@
       </p:sp>
       <p:sp>
         <p:nvSpPr>
-          <p:cNvPr id="10" name="TextBox 9"/>
+          <p:cNvPr id="12" name="TextBox 11"/>
           <p:cNvSpPr txBox="1"/>
           <p:nvPr/>
         </p:nvSpPr>
         <p:spPr>
           <a:xfrm>
-            <a:off x="3459403" y="2514600"/>
-            <a:ext cx="2590723" cy="457200"/>
+            <a:off x="3413683" y="2697480"/>
+            <a:ext cx="2636443" cy="457200"/>
           </a:xfrm>
           <a:prstGeom prst="rect">
             <a:avLst/>
@@ -4175,7 +4395,7 @@
             <a:r>
               <a:rPr sz="1600" b="1" i="0">
                 <a:solidFill>
-                  <a:srgbClr val="26C54E"/>
+                  <a:srgbClr val="EAD07B"/>
                 </a:solidFill>
               </a:rPr>
               <a:t>첫 데이트</a:t>
@@ -4185,14 +4405,14 @@
       </p:sp>
       <p:sp>
         <p:nvSpPr>
-          <p:cNvPr id="11" name="TextBox 10"/>
+          <p:cNvPr id="13" name="TextBox 12"/>
           <p:cNvSpPr txBox="1"/>
           <p:nvPr/>
         </p:nvSpPr>
         <p:spPr>
           <a:xfrm>
-            <a:off x="3505123" y="3703320"/>
-            <a:ext cx="2499283" cy="457200"/>
+            <a:off x="3459403" y="3886200"/>
+            <a:ext cx="2545003" cy="457200"/>
           </a:xfrm>
           <a:prstGeom prst="rect">
             <a:avLst/>
@@ -4213,7 +4433,7 @@
             <a:r>
               <a:rPr sz="1800" b="1" i="0">
                 <a:solidFill>
-                  <a:srgbClr val="115F25"/>
+                  <a:srgbClr val="494127"/>
                 </a:solidFill>
               </a:rPr>
               <a:t>설레던 하루</a:t>
@@ -4223,14 +4443,14 @@
       </p:sp>
       <p:sp>
         <p:nvSpPr>
-          <p:cNvPr id="12" name="TextBox 11"/>
+          <p:cNvPr id="14" name="TextBox 13"/>
           <p:cNvSpPr txBox="1"/>
           <p:nvPr/>
         </p:nvSpPr>
         <p:spPr>
           <a:xfrm>
-            <a:off x="3505123" y="4206240"/>
-            <a:ext cx="2499283" cy="1645920"/>
+            <a:off x="3459403" y="4389120"/>
+            <a:ext cx="2545003" cy="1645920"/>
           </a:xfrm>
           <a:prstGeom prst="rect">
             <a:avLst/>
@@ -4251,7 +4471,7 @@
             <a:r>
               <a:rPr sz="1500" b="0" i="0">
                 <a:solidFill>
-                  <a:srgbClr val="2B2B2B"/>
+                  <a:srgbClr val="26231F"/>
                 </a:solidFill>
               </a:rPr>
               <a:t>무엇을 했나요?</a:t>
@@ -4261,20 +4481,20 @@
       </p:sp>
       <p:sp>
         <p:nvSpPr>
-          <p:cNvPr id="13" name="때 3"/>
+          <p:cNvPr id="15" name="때 3"/>
           <p:cNvSpPr/>
           <p:nvPr/>
         </p:nvSpPr>
         <p:spPr>
           <a:xfrm>
-            <a:off x="7235761" y="3154680"/>
+            <a:off x="7258621" y="3337560"/>
             <a:ext cx="402336" cy="402336"/>
           </a:xfrm>
           <a:prstGeom prst="ellipse">
             <a:avLst/>
           </a:prstGeom>
           <a:solidFill>
-            <a:srgbClr val="26C54E"/>
+            <a:srgbClr val="EAD07B"/>
           </a:solidFill>
           <a:ln w="38100">
             <a:solidFill>
@@ -4292,14 +4512,14 @@
       </p:sp>
       <p:sp>
         <p:nvSpPr>
-          <p:cNvPr id="14" name="TextBox 13"/>
+          <p:cNvPr id="16" name="TextBox 15"/>
           <p:cNvSpPr txBox="1"/>
           <p:nvPr/>
         </p:nvSpPr>
         <p:spPr>
           <a:xfrm>
-            <a:off x="6141567" y="2514600"/>
-            <a:ext cx="2590723" cy="457200"/>
+            <a:off x="6141567" y="2697480"/>
+            <a:ext cx="2636443" cy="457200"/>
           </a:xfrm>
           <a:prstGeom prst="rect">
             <a:avLst/>
@@ -4320,7 +4540,7 @@
             <a:r>
               <a:rPr sz="1600" b="1" i="0">
                 <a:solidFill>
-                  <a:srgbClr val="26C54E"/>
+                  <a:srgbClr val="EAD07B"/>
                 </a:solidFill>
               </a:rPr>
               <a:t>프러포즈</a:t>
@@ -4330,14 +4550,14 @@
       </p:sp>
       <p:sp>
         <p:nvSpPr>
-          <p:cNvPr id="15" name="TextBox 14"/>
+          <p:cNvPr id="17" name="TextBox 16"/>
           <p:cNvSpPr txBox="1"/>
           <p:nvPr/>
         </p:nvSpPr>
         <p:spPr>
           <a:xfrm>
-            <a:off x="6187287" y="3703320"/>
-            <a:ext cx="2499283" cy="457200"/>
+            <a:off x="6187287" y="3886200"/>
+            <a:ext cx="2545003" cy="457200"/>
           </a:xfrm>
           <a:prstGeom prst="rect">
             <a:avLst/>
@@ -4358,7 +4578,7 @@
             <a:r>
               <a:rPr sz="1800" b="1" i="0">
                 <a:solidFill>
-                  <a:srgbClr val="115F25"/>
+                  <a:srgbClr val="494127"/>
                 </a:solidFill>
               </a:rPr>
               <a:t>평생을 약속하다</a:t>
@@ -4368,14 +4588,14 @@
       </p:sp>
       <p:sp>
         <p:nvSpPr>
-          <p:cNvPr id="16" name="TextBox 15"/>
+          <p:cNvPr id="18" name="TextBox 17"/>
           <p:cNvSpPr txBox="1"/>
           <p:nvPr/>
         </p:nvSpPr>
         <p:spPr>
           <a:xfrm>
-            <a:off x="6187287" y="4206240"/>
-            <a:ext cx="2499283" cy="1645920"/>
+            <a:off x="6187287" y="4389120"/>
+            <a:ext cx="2545003" cy="1645920"/>
           </a:xfrm>
           <a:prstGeom prst="rect">
             <a:avLst/>
@@ -4396,7 +4616,7 @@
             <a:r>
               <a:rPr sz="1500" b="0" i="0">
                 <a:solidFill>
-                  <a:srgbClr val="2B2B2B"/>
+                  <a:srgbClr val="26231F"/>
                 </a:solidFill>
               </a:rPr>
               <a:t>그날의 이야기</a:t>
@@ -4406,20 +4626,20 @@
       </p:sp>
       <p:sp>
         <p:nvSpPr>
-          <p:cNvPr id="17" name="때 4"/>
+          <p:cNvPr id="19" name="때 4"/>
           <p:cNvSpPr/>
           <p:nvPr/>
         </p:nvSpPr>
         <p:spPr>
           <a:xfrm>
-            <a:off x="9917925" y="3154680"/>
+            <a:off x="9986505" y="3337560"/>
             <a:ext cx="402336" cy="402336"/>
           </a:xfrm>
           <a:prstGeom prst="ellipse">
             <a:avLst/>
           </a:prstGeom>
           <a:solidFill>
-            <a:srgbClr val="26C54E"/>
+            <a:srgbClr val="EAD07B"/>
           </a:solidFill>
           <a:ln w="38100">
             <a:solidFill>
@@ -4437,14 +4657,14 @@
       </p:sp>
       <p:sp>
         <p:nvSpPr>
-          <p:cNvPr id="18" name="TextBox 17"/>
+          <p:cNvPr id="20" name="TextBox 19"/>
           <p:cNvSpPr txBox="1"/>
           <p:nvPr/>
         </p:nvSpPr>
         <p:spPr>
           <a:xfrm>
-            <a:off x="8823731" y="2514600"/>
-            <a:ext cx="2590723" cy="457200"/>
+            <a:off x="8869451" y="2697480"/>
+            <a:ext cx="2636443" cy="457200"/>
           </a:xfrm>
           <a:prstGeom prst="rect">
             <a:avLst/>
@@ -4465,7 +4685,7 @@
             <a:r>
               <a:rPr sz="1600" b="1" i="0">
                 <a:solidFill>
-                  <a:srgbClr val="26C54E"/>
+                  <a:srgbClr val="EAD07B"/>
                 </a:solidFill>
               </a:rPr>
               <a:t>결혼</a:t>
@@ -4475,14 +4695,14 @@
       </p:sp>
       <p:sp>
         <p:nvSpPr>
-          <p:cNvPr id="19" name="TextBox 18"/>
+          <p:cNvPr id="21" name="TextBox 20"/>
           <p:cNvSpPr txBox="1"/>
           <p:nvPr/>
         </p:nvSpPr>
         <p:spPr>
           <a:xfrm>
-            <a:off x="8869451" y="3703320"/>
-            <a:ext cx="2499283" cy="457200"/>
+            <a:off x="8915171" y="3886200"/>
+            <a:ext cx="2545003" cy="457200"/>
           </a:xfrm>
           <a:prstGeom prst="rect">
             <a:avLst/>
@@ -4503,7 +4723,7 @@
             <a:r>
               <a:rPr sz="1800" b="1" i="0">
                 <a:solidFill>
-                  <a:srgbClr val="115F25"/>
+                  <a:srgbClr val="494127"/>
                 </a:solidFill>
               </a:rPr>
               <a:t>오늘의 우리</a:t>
@@ -4513,14 +4733,14 @@
       </p:sp>
       <p:sp>
         <p:nvSpPr>
-          <p:cNvPr id="20" name="TextBox 19"/>
+          <p:cNvPr id="22" name="TextBox 21"/>
           <p:cNvSpPr txBox="1"/>
           <p:nvPr/>
         </p:nvSpPr>
         <p:spPr>
           <a:xfrm>
-            <a:off x="8869451" y="4206240"/>
-            <a:ext cx="2499283" cy="1645920"/>
+            <a:off x="8915171" y="4389120"/>
+            <a:ext cx="2545003" cy="1645920"/>
           </a:xfrm>
           <a:prstGeom prst="rect">
             <a:avLst/>
@@ -4541,7 +4761,7 @@
             <a:r>
               <a:rPr sz="1500" b="0" i="0">
                 <a:solidFill>
-                  <a:srgbClr val="2B2B2B"/>
+                  <a:srgbClr val="26231F"/>
                 </a:solidFill>
               </a:rPr>
               <a:t>함께 시작합니다</a:t>
@@ -4563,7 +4783,7 @@
     <p:bg>
       <p:bgPr>
         <a:solidFill>
-          <a:srgbClr val="26C54E"/>
+          <a:srgbClr val="FFFFFF"/>
         </a:solidFill>
         <a:effectLst/>
       </p:bgPr>
@@ -4583,16 +4803,14 @@
         </p:nvSpPr>
         <p:spPr>
           <a:xfrm>
-            <a:off x="274320" y="274320"/>
-            <a:ext cx="11643055" cy="6309360"/>
-          </a:xfrm>
-          <a:prstGeom prst="roundRect">
-            <a:avLst>
-              <a:gd name="adj" fmla="val 3500"/>
-            </a:avLst>
+            <a:off x="640080" y="566928"/>
+            <a:ext cx="10911535" cy="10972"/>
+          </a:xfrm>
+          <a:prstGeom prst="rect">
+            <a:avLst/>
           </a:prstGeom>
           <a:solidFill>
-            <a:srgbClr val="FFFFFF"/>
+            <a:srgbClr val="26231F"/>
           </a:solidFill>
           <a:ln>
             <a:noFill/>
@@ -4608,6 +4826,73 @@
       </p:sp>
       <p:sp>
         <p:nvSpPr>
+          <p:cNvPr id="4" name="상단 라벨"/>
+          <p:cNvSpPr txBox="1"/>
+          <p:nvPr/>
+        </p:nvSpPr>
+        <p:spPr>
+          <a:xfrm>
+            <a:off x="640080" y="237744"/>
+            <a:ext cx="5486400" cy="274320"/>
+          </a:xfrm>
+          <a:prstGeom prst="rect">
+            <a:avLst/>
+          </a:prstGeom>
+          <a:noFill/>
+        </p:spPr>
+        <p:txBody>
+          <a:bodyPr wrap="square" lIns="54864" rIns="54864" tIns="27432" bIns="27432" anchor="ctr">
+            <a:noAutofit/>
+          </a:bodyPr>
+          <a:lstStyle/>
+          <a:p>
+            <a:pPr algn="l">
+              <a:lnSpc>
+                <a:spcPct val="115000"/>
+              </a:lnSpc>
+            </a:pPr>
+            <a:r>
+              <a:rPr sz="900" b="1" i="0" spc="250">
+                <a:solidFill>
+                  <a:srgbClr val="26231F"/>
+                </a:solidFill>
+              </a:rPr>
+              <a:t>WEDDING</a:t>
+            </a:r>
+          </a:p>
+        </p:txBody>
+      </p:sp>
+      <p:sp>
+        <p:nvSpPr>
+          <p:cNvPr id="5" name="포인트"/>
+          <p:cNvSpPr/>
+          <p:nvPr/>
+        </p:nvSpPr>
+        <p:spPr>
+          <a:xfrm>
+            <a:off x="11204143" y="246888"/>
+            <a:ext cx="237744" cy="237744"/>
+          </a:xfrm>
+          <a:prstGeom prst="moon">
+            <a:avLst/>
+          </a:prstGeom>
+          <a:solidFill>
+            <a:srgbClr val="EAD07B"/>
+          </a:solidFill>
+          <a:ln>
+            <a:noFill/>
+          </a:ln>
+        </p:spPr>
+        <p:txBody>
+          <a:bodyPr rtlCol="0" anchor="ctr"/>
+          <a:lstStyle/>
+          <a:p>
+            <a:pPr algn="ctr"/>
+          </a:p>
+        </p:txBody>
+      </p:sp>
+      <p:sp>
+        <p:nvSpPr>
           <p:cNvPr id="2" name="Title 1"/>
           <p:cNvSpPr>
             <a:spLocks noGrp="1"/>
@@ -4618,8 +4903,8 @@
         </p:nvSpPr>
         <p:spPr>
           <a:xfrm>
-            <a:off x="731520" y="548640"/>
-            <a:ext cx="9448495" cy="868680"/>
+            <a:off x="640080" y="731520"/>
+            <a:ext cx="10911535" cy="822960"/>
           </a:xfrm>
         </p:spPr>
         <p:txBody>
@@ -4636,7 +4921,7 @@
             <a:r>
               <a:rPr sz="3000" b="1" i="0">
                 <a:solidFill>
-                  <a:srgbClr val="115F25"/>
+                  <a:srgbClr val="26231F"/>
                 </a:solidFill>
               </a:rPr>
               <a:t>우리의 첫 번째</a:t>
@@ -4646,27 +4931,25 @@
       </p:sp>
       <p:sp>
         <p:nvSpPr>
-          <p:cNvPr id="4" name="카드 1"/>
+          <p:cNvPr id="6" name="카드 1"/>
           <p:cNvSpPr/>
           <p:nvPr/>
         </p:nvSpPr>
         <p:spPr>
           <a:xfrm>
-            <a:off x="731520" y="1600200"/>
-            <a:ext cx="2510713" cy="4617720"/>
+            <a:off x="640080" y="1783080"/>
+            <a:ext cx="2556433" cy="4572000"/>
           </a:xfrm>
           <a:prstGeom prst="roundRect">
             <a:avLst>
-              <a:gd name="adj" fmla="val 8000"/>
+              <a:gd name="adj" fmla="val 4000"/>
             </a:avLst>
           </a:prstGeom>
           <a:solidFill>
-            <a:srgbClr val="EEFCF1"/>
+            <a:srgbClr val="FDF8EA"/>
           </a:solidFill>
-          <a:ln w="15875">
-            <a:solidFill>
-              <a:srgbClr val="D1FADC"/>
-            </a:solidFill>
+          <a:ln>
+            <a:noFill/>
           </a:ln>
         </p:spPr>
         <p:txBody>
@@ -4679,20 +4962,49 @@
       </p:sp>
       <p:sp>
         <p:nvSpPr>
-          <p:cNvPr id="5" name="번호 1"/>
+          <p:cNvPr id="7" name="포인트 막대"/>
           <p:cNvSpPr/>
           <p:nvPr/>
         </p:nvSpPr>
         <p:spPr>
           <a:xfrm>
-            <a:off x="914400" y="1783080"/>
+            <a:off x="640080" y="1892807"/>
+            <a:ext cx="54864" cy="4352544"/>
+          </a:xfrm>
+          <a:prstGeom prst="rect">
+            <a:avLst/>
+          </a:prstGeom>
+          <a:solidFill>
+            <a:srgbClr val="EAD07B"/>
+          </a:solidFill>
+          <a:ln>
+            <a:noFill/>
+          </a:ln>
+        </p:spPr>
+        <p:txBody>
+          <a:bodyPr rtlCol="0" anchor="ctr"/>
+          <a:lstStyle/>
+          <a:p>
+            <a:pPr algn="ctr"/>
+          </a:p>
+        </p:txBody>
+      </p:sp>
+      <p:sp>
+        <p:nvSpPr>
+          <p:cNvPr id="8" name="번호 1"/>
+          <p:cNvSpPr/>
+          <p:nvPr/>
+        </p:nvSpPr>
+        <p:spPr>
+          <a:xfrm>
+            <a:off x="822959" y="1965960"/>
             <a:ext cx="457200" cy="457200"/>
           </a:xfrm>
           <a:prstGeom prst="ellipse">
             <a:avLst/>
           </a:prstGeom>
           <a:solidFill>
-            <a:srgbClr val="26C54E"/>
+            <a:srgbClr val="EAD07B"/>
           </a:solidFill>
           <a:ln>
             <a:noFill/>
@@ -4712,7 +5024,7 @@
             <a:r>
               <a:rPr sz="1600" b="1" i="0">
                 <a:solidFill>
-                  <a:srgbClr val="FFFFFF"/>
+                  <a:srgbClr val="26231F"/>
                 </a:solidFill>
               </a:rPr>
               <a:t>1</a:t>
@@ -4722,14 +5034,14 @@
       </p:sp>
       <p:sp>
         <p:nvSpPr>
-          <p:cNvPr id="6" name="TextBox 5"/>
+          <p:cNvPr id="9" name="TextBox 8"/>
           <p:cNvSpPr txBox="1"/>
           <p:nvPr/>
         </p:nvSpPr>
         <p:spPr>
           <a:xfrm>
-            <a:off x="868680" y="2377440"/>
-            <a:ext cx="2236393" cy="640080"/>
+            <a:off x="777240" y="2560320"/>
+            <a:ext cx="2282113" cy="640080"/>
           </a:xfrm>
           <a:prstGeom prst="rect">
             <a:avLst/>
@@ -4750,7 +5062,7 @@
             <a:r>
               <a:rPr sz="1800" b="1" i="0">
                 <a:solidFill>
-                  <a:srgbClr val="115F25"/>
+                  <a:srgbClr val="494127"/>
                 </a:solidFill>
               </a:rPr>
               <a:t>첫 여행</a:t>
@@ -4760,14 +5072,14 @@
       </p:sp>
       <p:sp>
         <p:nvSpPr>
-          <p:cNvPr id="7" name="TextBox 6"/>
+          <p:cNvPr id="10" name="TextBox 9"/>
           <p:cNvSpPr txBox="1"/>
           <p:nvPr/>
         </p:nvSpPr>
         <p:spPr>
           <a:xfrm>
-            <a:off x="868680" y="3063240"/>
-            <a:ext cx="2236393" cy="3017520"/>
+            <a:off x="777240" y="3246120"/>
+            <a:ext cx="2282113" cy="2971800"/>
           </a:xfrm>
           <a:prstGeom prst="rect">
             <a:avLst/>
@@ -4788,7 +5100,7 @@
             <a:r>
               <a:rPr sz="1500" b="0" i="0">
                 <a:solidFill>
-                  <a:srgbClr val="2B2B2B"/>
+                  <a:srgbClr val="26231F"/>
                 </a:solidFill>
               </a:rPr>
               <a:t>어디였나요?</a:t>
@@ -4798,27 +5110,25 @@
       </p:sp>
       <p:sp>
         <p:nvSpPr>
-          <p:cNvPr id="8" name="카드 2"/>
+          <p:cNvPr id="11" name="카드 2"/>
           <p:cNvSpPr/>
           <p:nvPr/>
         </p:nvSpPr>
         <p:spPr>
           <a:xfrm>
-            <a:off x="3470833" y="1600200"/>
-            <a:ext cx="2510713" cy="4617720"/>
+            <a:off x="3425113" y="1783080"/>
+            <a:ext cx="2556433" cy="4572000"/>
           </a:xfrm>
           <a:prstGeom prst="roundRect">
             <a:avLst>
-              <a:gd name="adj" fmla="val 8000"/>
+              <a:gd name="adj" fmla="val 4000"/>
             </a:avLst>
           </a:prstGeom>
           <a:solidFill>
-            <a:srgbClr val="EEFCF1"/>
+            <a:srgbClr val="FDF8EA"/>
           </a:solidFill>
-          <a:ln w="15875">
-            <a:solidFill>
-              <a:srgbClr val="D1FADC"/>
-            </a:solidFill>
+          <a:ln>
+            <a:noFill/>
           </a:ln>
         </p:spPr>
         <p:txBody>
@@ -4831,20 +5141,49 @@
       </p:sp>
       <p:sp>
         <p:nvSpPr>
-          <p:cNvPr id="9" name="번호 2"/>
+          <p:cNvPr id="12" name="포인트 막대"/>
           <p:cNvSpPr/>
           <p:nvPr/>
         </p:nvSpPr>
         <p:spPr>
           <a:xfrm>
-            <a:off x="3653713" y="1783080"/>
+            <a:off x="3425113" y="1892807"/>
+            <a:ext cx="54864" cy="4352544"/>
+          </a:xfrm>
+          <a:prstGeom prst="rect">
+            <a:avLst/>
+          </a:prstGeom>
+          <a:solidFill>
+            <a:srgbClr val="EAD07B"/>
+          </a:solidFill>
+          <a:ln>
+            <a:noFill/>
+          </a:ln>
+        </p:spPr>
+        <p:txBody>
+          <a:bodyPr rtlCol="0" anchor="ctr"/>
+          <a:lstStyle/>
+          <a:p>
+            <a:pPr algn="ctr"/>
+          </a:p>
+        </p:txBody>
+      </p:sp>
+      <p:sp>
+        <p:nvSpPr>
+          <p:cNvPr id="13" name="번호 2"/>
+          <p:cNvSpPr/>
+          <p:nvPr/>
+        </p:nvSpPr>
+        <p:spPr>
+          <a:xfrm>
+            <a:off x="3607993" y="1965960"/>
             <a:ext cx="457200" cy="457200"/>
           </a:xfrm>
           <a:prstGeom prst="ellipse">
             <a:avLst/>
           </a:prstGeom>
           <a:solidFill>
-            <a:srgbClr val="26C54E"/>
+            <a:srgbClr val="EAD07B"/>
           </a:solidFill>
           <a:ln>
             <a:noFill/>
@@ -4864,7 +5203,7 @@
             <a:r>
               <a:rPr sz="1600" b="1" i="0">
                 <a:solidFill>
-                  <a:srgbClr val="FFFFFF"/>
+                  <a:srgbClr val="26231F"/>
                 </a:solidFill>
               </a:rPr>
               <a:t>2</a:t>
@@ -4874,14 +5213,14 @@
       </p:sp>
       <p:sp>
         <p:nvSpPr>
-          <p:cNvPr id="10" name="TextBox 9"/>
+          <p:cNvPr id="14" name="TextBox 13"/>
           <p:cNvSpPr txBox="1"/>
           <p:nvPr/>
         </p:nvSpPr>
         <p:spPr>
           <a:xfrm>
-            <a:off x="3607993" y="2377440"/>
-            <a:ext cx="2236393" cy="640080"/>
+            <a:off x="3562273" y="2560320"/>
+            <a:ext cx="2282113" cy="640080"/>
           </a:xfrm>
           <a:prstGeom prst="rect">
             <a:avLst/>
@@ -4902,7 +5241,7 @@
             <a:r>
               <a:rPr sz="1800" b="1" i="0">
                 <a:solidFill>
-                  <a:srgbClr val="115F25"/>
+                  <a:srgbClr val="494127"/>
                 </a:solidFill>
               </a:rPr>
               <a:t>첫 선물</a:t>
@@ -4912,14 +5251,14 @@
       </p:sp>
       <p:sp>
         <p:nvSpPr>
-          <p:cNvPr id="11" name="TextBox 10"/>
+          <p:cNvPr id="15" name="TextBox 14"/>
           <p:cNvSpPr txBox="1"/>
           <p:nvPr/>
         </p:nvSpPr>
         <p:spPr>
           <a:xfrm>
-            <a:off x="3607993" y="3063240"/>
-            <a:ext cx="2236393" cy="3017520"/>
+            <a:off x="3562273" y="3246120"/>
+            <a:ext cx="2282113" cy="2971800"/>
           </a:xfrm>
           <a:prstGeom prst="rect">
             <a:avLst/>
@@ -4940,7 +5279,7 @@
             <a:r>
               <a:rPr sz="1500" b="0" i="0">
                 <a:solidFill>
-                  <a:srgbClr val="2B2B2B"/>
+                  <a:srgbClr val="26231F"/>
                 </a:solidFill>
               </a:rPr>
               <a:t>무엇이었나요?</a:t>
@@ -4950,27 +5289,25 @@
       </p:sp>
       <p:sp>
         <p:nvSpPr>
-          <p:cNvPr id="12" name="카드 3"/>
+          <p:cNvPr id="16" name="카드 3"/>
           <p:cNvSpPr/>
           <p:nvPr/>
         </p:nvSpPr>
         <p:spPr>
           <a:xfrm>
-            <a:off x="6210147" y="1600200"/>
-            <a:ext cx="2510713" cy="4617720"/>
+            <a:off x="6210147" y="1783080"/>
+            <a:ext cx="2556433" cy="4572000"/>
           </a:xfrm>
           <a:prstGeom prst="roundRect">
             <a:avLst>
-              <a:gd name="adj" fmla="val 8000"/>
+              <a:gd name="adj" fmla="val 4000"/>
             </a:avLst>
           </a:prstGeom>
           <a:solidFill>
-            <a:srgbClr val="EEFCF1"/>
+            <a:srgbClr val="FDF8EA"/>
           </a:solidFill>
-          <a:ln w="15875">
-            <a:solidFill>
-              <a:srgbClr val="D1FADC"/>
-            </a:solidFill>
+          <a:ln>
+            <a:noFill/>
           </a:ln>
         </p:spPr>
         <p:txBody>
@@ -4983,20 +5320,49 @@
       </p:sp>
       <p:sp>
         <p:nvSpPr>
-          <p:cNvPr id="13" name="번호 3"/>
+          <p:cNvPr id="17" name="포인트 막대"/>
           <p:cNvSpPr/>
           <p:nvPr/>
         </p:nvSpPr>
         <p:spPr>
           <a:xfrm>
-            <a:off x="6393027" y="1783080"/>
+            <a:off x="6210147" y="1892807"/>
+            <a:ext cx="54864" cy="4352544"/>
+          </a:xfrm>
+          <a:prstGeom prst="rect">
+            <a:avLst/>
+          </a:prstGeom>
+          <a:solidFill>
+            <a:srgbClr val="EAD07B"/>
+          </a:solidFill>
+          <a:ln>
+            <a:noFill/>
+          </a:ln>
+        </p:spPr>
+        <p:txBody>
+          <a:bodyPr rtlCol="0" anchor="ctr"/>
+          <a:lstStyle/>
+          <a:p>
+            <a:pPr algn="ctr"/>
+          </a:p>
+        </p:txBody>
+      </p:sp>
+      <p:sp>
+        <p:nvSpPr>
+          <p:cNvPr id="18" name="번호 3"/>
+          <p:cNvSpPr/>
+          <p:nvPr/>
+        </p:nvSpPr>
+        <p:spPr>
+          <a:xfrm>
+            <a:off x="6393027" y="1965960"/>
             <a:ext cx="457200" cy="457200"/>
           </a:xfrm>
           <a:prstGeom prst="ellipse">
             <a:avLst/>
           </a:prstGeom>
           <a:solidFill>
-            <a:srgbClr val="26C54E"/>
+            <a:srgbClr val="EAD07B"/>
           </a:solidFill>
           <a:ln>
             <a:noFill/>
@@ -5016,7 +5382,7 @@
             <a:r>
               <a:rPr sz="1600" b="1" i="0">
                 <a:solidFill>
-                  <a:srgbClr val="FFFFFF"/>
+                  <a:srgbClr val="26231F"/>
                 </a:solidFill>
               </a:rPr>
               <a:t>3</a:t>
@@ -5026,14 +5392,14 @@
       </p:sp>
       <p:sp>
         <p:nvSpPr>
-          <p:cNvPr id="14" name="TextBox 13"/>
+          <p:cNvPr id="19" name="TextBox 18"/>
           <p:cNvSpPr txBox="1"/>
           <p:nvPr/>
         </p:nvSpPr>
         <p:spPr>
           <a:xfrm>
-            <a:off x="6347307" y="2377440"/>
-            <a:ext cx="2236393" cy="640080"/>
+            <a:off x="6347307" y="2560320"/>
+            <a:ext cx="2282113" cy="640080"/>
           </a:xfrm>
           <a:prstGeom prst="rect">
             <a:avLst/>
@@ -5054,7 +5420,7 @@
             <a:r>
               <a:rPr sz="1800" b="1" i="0">
                 <a:solidFill>
-                  <a:srgbClr val="115F25"/>
+                  <a:srgbClr val="494127"/>
                 </a:solidFill>
               </a:rPr>
               <a:t>첫 다툼</a:t>
@@ -5064,14 +5430,14 @@
       </p:sp>
       <p:sp>
         <p:nvSpPr>
-          <p:cNvPr id="15" name="TextBox 14"/>
+          <p:cNvPr id="20" name="TextBox 19"/>
           <p:cNvSpPr txBox="1"/>
           <p:nvPr/>
         </p:nvSpPr>
         <p:spPr>
           <a:xfrm>
-            <a:off x="6347307" y="3063240"/>
-            <a:ext cx="2236393" cy="3017520"/>
+            <a:off x="6347307" y="3246120"/>
+            <a:ext cx="2282113" cy="2971800"/>
           </a:xfrm>
           <a:prstGeom prst="rect">
             <a:avLst/>
@@ -5092,7 +5458,7 @@
             <a:r>
               <a:rPr sz="1500" b="0" i="0">
                 <a:solidFill>
-                  <a:srgbClr val="2B2B2B"/>
+                  <a:srgbClr val="26231F"/>
                 </a:solidFill>
               </a:rPr>
               <a:t>어떻게 풀었나요?</a:t>
@@ -5102,27 +5468,25 @@
       </p:sp>
       <p:sp>
         <p:nvSpPr>
-          <p:cNvPr id="16" name="카드 4"/>
+          <p:cNvPr id="21" name="카드 4"/>
           <p:cNvSpPr/>
           <p:nvPr/>
         </p:nvSpPr>
         <p:spPr>
           <a:xfrm>
-            <a:off x="8949461" y="1600200"/>
-            <a:ext cx="2510713" cy="4617720"/>
+            <a:off x="8995181" y="1783080"/>
+            <a:ext cx="2556433" cy="4572000"/>
           </a:xfrm>
           <a:prstGeom prst="roundRect">
             <a:avLst>
-              <a:gd name="adj" fmla="val 8000"/>
+              <a:gd name="adj" fmla="val 4000"/>
             </a:avLst>
           </a:prstGeom>
           <a:solidFill>
-            <a:srgbClr val="EEFCF1"/>
+            <a:srgbClr val="FDF8EA"/>
           </a:solidFill>
-          <a:ln w="15875">
-            <a:solidFill>
-              <a:srgbClr val="D1FADC"/>
-            </a:solidFill>
+          <a:ln>
+            <a:noFill/>
           </a:ln>
         </p:spPr>
         <p:txBody>
@@ -5135,20 +5499,49 @@
       </p:sp>
       <p:sp>
         <p:nvSpPr>
-          <p:cNvPr id="17" name="번호 4"/>
+          <p:cNvPr id="22" name="포인트 막대"/>
           <p:cNvSpPr/>
           <p:nvPr/>
         </p:nvSpPr>
         <p:spPr>
           <a:xfrm>
-            <a:off x="9132341" y="1783080"/>
+            <a:off x="8995181" y="1892807"/>
+            <a:ext cx="54864" cy="4352544"/>
+          </a:xfrm>
+          <a:prstGeom prst="rect">
+            <a:avLst/>
+          </a:prstGeom>
+          <a:solidFill>
+            <a:srgbClr val="EAD07B"/>
+          </a:solidFill>
+          <a:ln>
+            <a:noFill/>
+          </a:ln>
+        </p:spPr>
+        <p:txBody>
+          <a:bodyPr rtlCol="0" anchor="ctr"/>
+          <a:lstStyle/>
+          <a:p>
+            <a:pPr algn="ctr"/>
+          </a:p>
+        </p:txBody>
+      </p:sp>
+      <p:sp>
+        <p:nvSpPr>
+          <p:cNvPr id="23" name="번호 4"/>
+          <p:cNvSpPr/>
+          <p:nvPr/>
+        </p:nvSpPr>
+        <p:spPr>
+          <a:xfrm>
+            <a:off x="9178061" y="1965960"/>
             <a:ext cx="457200" cy="457200"/>
           </a:xfrm>
           <a:prstGeom prst="ellipse">
             <a:avLst/>
           </a:prstGeom>
           <a:solidFill>
-            <a:srgbClr val="26C54E"/>
+            <a:srgbClr val="EAD07B"/>
           </a:solidFill>
           <a:ln>
             <a:noFill/>
@@ -5168,7 +5561,7 @@
             <a:r>
               <a:rPr sz="1600" b="1" i="0">
                 <a:solidFill>
-                  <a:srgbClr val="FFFFFF"/>
+                  <a:srgbClr val="26231F"/>
                 </a:solidFill>
               </a:rPr>
               <a:t>4</a:t>
@@ -5178,14 +5571,14 @@
       </p:sp>
       <p:sp>
         <p:nvSpPr>
-          <p:cNvPr id="18" name="TextBox 17"/>
+          <p:cNvPr id="24" name="TextBox 23"/>
           <p:cNvSpPr txBox="1"/>
           <p:nvPr/>
         </p:nvSpPr>
         <p:spPr>
           <a:xfrm>
-            <a:off x="9086621" y="2377440"/>
-            <a:ext cx="2236393" cy="640080"/>
+            <a:off x="9132341" y="2560320"/>
+            <a:ext cx="2282113" cy="640080"/>
           </a:xfrm>
           <a:prstGeom prst="rect">
             <a:avLst/>
@@ -5206,7 +5599,7 @@
             <a:r>
               <a:rPr sz="1800" b="1" i="0">
                 <a:solidFill>
-                  <a:srgbClr val="115F25"/>
+                  <a:srgbClr val="494127"/>
                 </a:solidFill>
               </a:rPr>
               <a:t>첫 약속</a:t>
@@ -5216,14 +5609,14 @@
       </p:sp>
       <p:sp>
         <p:nvSpPr>
-          <p:cNvPr id="19" name="TextBox 18"/>
+          <p:cNvPr id="25" name="TextBox 24"/>
           <p:cNvSpPr txBox="1"/>
           <p:nvPr/>
         </p:nvSpPr>
         <p:spPr>
           <a:xfrm>
-            <a:off x="9086621" y="3063240"/>
-            <a:ext cx="2236393" cy="3017520"/>
+            <a:off x="9132341" y="3246120"/>
+            <a:ext cx="2282113" cy="2971800"/>
           </a:xfrm>
           <a:prstGeom prst="rect">
             <a:avLst/>
@@ -5244,7 +5637,7 @@
             <a:r>
               <a:rPr sz="1500" b="0" i="0">
                 <a:solidFill>
-                  <a:srgbClr val="2B2B2B"/>
+                  <a:srgbClr val="26231F"/>
                 </a:solidFill>
               </a:rPr>
               <a:t>무엇이었나요?</a:t>
@@ -5266,7 +5659,7 @@
     <p:bg>
       <p:bgPr>
         <a:solidFill>
-          <a:srgbClr val="26C54E"/>
+          <a:srgbClr val="FFFFFF"/>
         </a:solidFill>
         <a:effectLst/>
       </p:bgPr>
@@ -5286,16 +5679,14 @@
         </p:nvSpPr>
         <p:spPr>
           <a:xfrm>
-            <a:off x="274320" y="274320"/>
-            <a:ext cx="11643055" cy="6309360"/>
-          </a:xfrm>
-          <a:prstGeom prst="roundRect">
-            <a:avLst>
-              <a:gd name="adj" fmla="val 3500"/>
-            </a:avLst>
+            <a:off x="640080" y="566928"/>
+            <a:ext cx="10911535" cy="10972"/>
+          </a:xfrm>
+          <a:prstGeom prst="rect">
+            <a:avLst/>
           </a:prstGeom>
           <a:solidFill>
-            <a:srgbClr val="FFFFFF"/>
+            <a:srgbClr val="26231F"/>
           </a:solidFill>
           <a:ln>
             <a:noFill/>
@@ -5311,6 +5702,73 @@
       </p:sp>
       <p:sp>
         <p:nvSpPr>
+          <p:cNvPr id="4" name="상단 라벨"/>
+          <p:cNvSpPr txBox="1"/>
+          <p:nvPr/>
+        </p:nvSpPr>
+        <p:spPr>
+          <a:xfrm>
+            <a:off x="640080" y="237744"/>
+            <a:ext cx="5486400" cy="274320"/>
+          </a:xfrm>
+          <a:prstGeom prst="rect">
+            <a:avLst/>
+          </a:prstGeom>
+          <a:noFill/>
+        </p:spPr>
+        <p:txBody>
+          <a:bodyPr wrap="square" lIns="54864" rIns="54864" tIns="27432" bIns="27432" anchor="ctr">
+            <a:noAutofit/>
+          </a:bodyPr>
+          <a:lstStyle/>
+          <a:p>
+            <a:pPr algn="l">
+              <a:lnSpc>
+                <a:spcPct val="115000"/>
+              </a:lnSpc>
+            </a:pPr>
+            <a:r>
+              <a:rPr sz="900" b="1" i="0" spc="250">
+                <a:solidFill>
+                  <a:srgbClr val="26231F"/>
+                </a:solidFill>
+              </a:rPr>
+              <a:t>WEDDING</a:t>
+            </a:r>
+          </a:p>
+        </p:txBody>
+      </p:sp>
+      <p:sp>
+        <p:nvSpPr>
+          <p:cNvPr id="5" name="포인트"/>
+          <p:cNvSpPr/>
+          <p:nvPr/>
+        </p:nvSpPr>
+        <p:spPr>
+          <a:xfrm>
+            <a:off x="11204143" y="246888"/>
+            <a:ext cx="237744" cy="237744"/>
+          </a:xfrm>
+          <a:prstGeom prst="moon">
+            <a:avLst/>
+          </a:prstGeom>
+          <a:solidFill>
+            <a:srgbClr val="EAD07B"/>
+          </a:solidFill>
+          <a:ln>
+            <a:noFill/>
+          </a:ln>
+        </p:spPr>
+        <p:txBody>
+          <a:bodyPr rtlCol="0" anchor="ctr"/>
+          <a:lstStyle/>
+          <a:p>
+            <a:pPr algn="ctr"/>
+          </a:p>
+        </p:txBody>
+      </p:sp>
+      <p:sp>
+        <p:nvSpPr>
           <p:cNvPr id="2" name="Title 1"/>
           <p:cNvSpPr>
             <a:spLocks noGrp="1"/>
@@ -5321,8 +5779,8 @@
         </p:nvSpPr>
         <p:spPr>
           <a:xfrm>
-            <a:off x="731520" y="548640"/>
-            <a:ext cx="9448495" cy="868680"/>
+            <a:off x="640080" y="731520"/>
+            <a:ext cx="10911535" cy="822960"/>
           </a:xfrm>
         </p:spPr>
         <p:txBody>
@@ -5339,7 +5797,7 @@
             <a:r>
               <a:rPr sz="3000" b="1" i="0">
                 <a:solidFill>
-                  <a:srgbClr val="115F25"/>
+                  <a:srgbClr val="26231F"/>
                 </a:solidFill>
               </a:rPr>
               <a:t>웨딩 사진</a:t>
@@ -5349,14 +5807,14 @@
       </p:sp>
       <p:sp>
         <p:nvSpPr>
-          <p:cNvPr id="4" name="사진 자리"/>
+          <p:cNvPr id="6" name="사진 자리"/>
           <p:cNvSpPr/>
           <p:nvPr/>
         </p:nvSpPr>
         <p:spPr>
           <a:xfrm>
-            <a:off x="731520" y="1600200"/>
-            <a:ext cx="3454298" cy="2217420"/>
+            <a:off x="640080" y="1783080"/>
+            <a:ext cx="3515258" cy="2194560"/>
           </a:xfrm>
           <a:prstGeom prst="roundRect">
             <a:avLst>
@@ -5364,12 +5822,10 @@
             </a:avLst>
           </a:prstGeom>
           <a:solidFill>
-            <a:srgbClr val="D1FADC"/>
+            <a:srgbClr val="FAF1D1"/>
           </a:solidFill>
           <a:ln w="19050">
-            <a:solidFill>
-              <a:srgbClr val="26C54E"/>
-            </a:solidFill>
+            <a:noFill/>
             <a:prstDash val="dash"/>
           </a:ln>
         </p:spPr>
@@ -5387,7 +5843,7 @@
             <a:r>
               <a:rPr sz="1200" b="0" i="0">
                 <a:solidFill>
-                  <a:srgbClr val="115F25"/>
+                  <a:srgbClr val="8E8780"/>
                 </a:solidFill>
               </a:rPr>
               <a:t>사진 1</a:t>
@@ -5397,14 +5853,14 @@
       </p:sp>
       <p:sp>
         <p:nvSpPr>
-          <p:cNvPr id="5" name="사진 자리"/>
+          <p:cNvPr id="7" name="사진 자리"/>
           <p:cNvSpPr/>
           <p:nvPr/>
         </p:nvSpPr>
         <p:spPr>
           <a:xfrm>
-            <a:off x="4368698" y="1600200"/>
-            <a:ext cx="3454298" cy="2217420"/>
+            <a:off x="4338218" y="1783080"/>
+            <a:ext cx="3515258" cy="2194560"/>
           </a:xfrm>
           <a:prstGeom prst="roundRect">
             <a:avLst>
@@ -5412,12 +5868,10 @@
             </a:avLst>
           </a:prstGeom>
           <a:solidFill>
-            <a:srgbClr val="D1FADC"/>
+            <a:srgbClr val="FAF1D1"/>
           </a:solidFill>
           <a:ln w="19050">
-            <a:solidFill>
-              <a:srgbClr val="26C54E"/>
-            </a:solidFill>
+            <a:noFill/>
             <a:prstDash val="dash"/>
           </a:ln>
         </p:spPr>
@@ -5435,7 +5889,7 @@
             <a:r>
               <a:rPr sz="1200" b="0" i="0">
                 <a:solidFill>
-                  <a:srgbClr val="115F25"/>
+                  <a:srgbClr val="8E8780"/>
                 </a:solidFill>
               </a:rPr>
               <a:t>사진 2</a:t>
@@ -5445,14 +5899,14 @@
       </p:sp>
       <p:sp>
         <p:nvSpPr>
-          <p:cNvPr id="6" name="사진 자리"/>
+          <p:cNvPr id="8" name="사진 자리"/>
           <p:cNvSpPr/>
           <p:nvPr/>
         </p:nvSpPr>
         <p:spPr>
           <a:xfrm>
-            <a:off x="8005876" y="1600200"/>
-            <a:ext cx="3454298" cy="2217420"/>
+            <a:off x="8036356" y="1783080"/>
+            <a:ext cx="3515258" cy="2194560"/>
           </a:xfrm>
           <a:prstGeom prst="roundRect">
             <a:avLst>
@@ -5460,12 +5914,10 @@
             </a:avLst>
           </a:prstGeom>
           <a:solidFill>
-            <a:srgbClr val="D1FADC"/>
+            <a:srgbClr val="FAF1D1"/>
           </a:solidFill>
           <a:ln w="19050">
-            <a:solidFill>
-              <a:srgbClr val="26C54E"/>
-            </a:solidFill>
+            <a:noFill/>
             <a:prstDash val="dash"/>
           </a:ln>
         </p:spPr>
@@ -5483,7 +5935,7 @@
             <a:r>
               <a:rPr sz="1200" b="0" i="0">
                 <a:solidFill>
-                  <a:srgbClr val="115F25"/>
+                  <a:srgbClr val="8E8780"/>
                 </a:solidFill>
               </a:rPr>
               <a:t>사진 3</a:t>
@@ -5493,14 +5945,14 @@
       </p:sp>
       <p:sp>
         <p:nvSpPr>
-          <p:cNvPr id="7" name="사진 자리"/>
+          <p:cNvPr id="9" name="사진 자리"/>
           <p:cNvSpPr/>
           <p:nvPr/>
         </p:nvSpPr>
         <p:spPr>
           <a:xfrm>
-            <a:off x="731520" y="4000500"/>
-            <a:ext cx="3454298" cy="2217420"/>
+            <a:off x="640080" y="4160520"/>
+            <a:ext cx="3515258" cy="2194560"/>
           </a:xfrm>
           <a:prstGeom prst="roundRect">
             <a:avLst>
@@ -5508,12 +5960,10 @@
             </a:avLst>
           </a:prstGeom>
           <a:solidFill>
-            <a:srgbClr val="D1FADC"/>
+            <a:srgbClr val="FAF1D1"/>
           </a:solidFill>
           <a:ln w="19050">
-            <a:solidFill>
-              <a:srgbClr val="26C54E"/>
-            </a:solidFill>
+            <a:noFill/>
             <a:prstDash val="dash"/>
           </a:ln>
         </p:spPr>
@@ -5531,7 +5981,7 @@
             <a:r>
               <a:rPr sz="1200" b="0" i="0">
                 <a:solidFill>
-                  <a:srgbClr val="115F25"/>
+                  <a:srgbClr val="8E8780"/>
                 </a:solidFill>
               </a:rPr>
               <a:t>사진 4</a:t>
@@ -5541,14 +5991,14 @@
       </p:sp>
       <p:sp>
         <p:nvSpPr>
-          <p:cNvPr id="8" name="사진 자리"/>
+          <p:cNvPr id="10" name="사진 자리"/>
           <p:cNvSpPr/>
           <p:nvPr/>
         </p:nvSpPr>
         <p:spPr>
           <a:xfrm>
-            <a:off x="4368698" y="4000500"/>
-            <a:ext cx="3454298" cy="2217420"/>
+            <a:off x="4338218" y="4160520"/>
+            <a:ext cx="3515258" cy="2194560"/>
           </a:xfrm>
           <a:prstGeom prst="roundRect">
             <a:avLst>
@@ -5556,12 +6006,10 @@
             </a:avLst>
           </a:prstGeom>
           <a:solidFill>
-            <a:srgbClr val="D1FADC"/>
+            <a:srgbClr val="FAF1D1"/>
           </a:solidFill>
           <a:ln w="19050">
-            <a:solidFill>
-              <a:srgbClr val="26C54E"/>
-            </a:solidFill>
+            <a:noFill/>
             <a:prstDash val="dash"/>
           </a:ln>
         </p:spPr>
@@ -5579,7 +6027,7 @@
             <a:r>
               <a:rPr sz="1200" b="0" i="0">
                 <a:solidFill>
-                  <a:srgbClr val="115F25"/>
+                  <a:srgbClr val="8E8780"/>
                 </a:solidFill>
               </a:rPr>
               <a:t>사진 5</a:t>
@@ -5589,14 +6037,14 @@
       </p:sp>
       <p:sp>
         <p:nvSpPr>
-          <p:cNvPr id="9" name="사진 자리"/>
+          <p:cNvPr id="11" name="사진 자리"/>
           <p:cNvSpPr/>
           <p:nvPr/>
         </p:nvSpPr>
         <p:spPr>
           <a:xfrm>
-            <a:off x="8005876" y="4000500"/>
-            <a:ext cx="3454298" cy="2217420"/>
+            <a:off x="8036356" y="4160520"/>
+            <a:ext cx="3515258" cy="2194560"/>
           </a:xfrm>
           <a:prstGeom prst="roundRect">
             <a:avLst>
@@ -5604,12 +6052,10 @@
             </a:avLst>
           </a:prstGeom>
           <a:solidFill>
-            <a:srgbClr val="D1FADC"/>
+            <a:srgbClr val="FAF1D1"/>
           </a:solidFill>
           <a:ln w="19050">
-            <a:solidFill>
-              <a:srgbClr val="26C54E"/>
-            </a:solidFill>
+            <a:noFill/>
             <a:prstDash val="dash"/>
           </a:ln>
         </p:spPr>
@@ -5627,7 +6073,7 @@
             <a:r>
               <a:rPr sz="1200" b="0" i="0">
                 <a:solidFill>
-                  <a:srgbClr val="115F25"/>
+                  <a:srgbClr val="8E8780"/>
                 </a:solidFill>
               </a:rPr>
               <a:t>사진 6</a:t>
@@ -5646,6 +6092,14 @@
 <file path=ppt/slides/slide6.xml><?xml version="1.0" encoding="utf-8"?>
 <p:sld xmlns:a="http://schemas.openxmlformats.org/drawingml/2006/main" xmlns:p="http://schemas.openxmlformats.org/presentationml/2006/main" xmlns:r="http://schemas.openxmlformats.org/officeDocument/2006/relationships">
   <p:cSld>
+    <p:bg>
+      <p:bgPr>
+        <a:solidFill>
+          <a:srgbClr val="FDF8EA"/>
+        </a:solidFill>
+        <a:effectLst/>
+      </p:bgPr>
+    </p:bg>
     <p:spTree>
       <p:nvGrpSpPr>
         <p:cNvPr id="1" name=""/>
@@ -5653,30 +6107,116 @@
         <p:nvPr/>
       </p:nvGrpSpPr>
       <p:grpSpPr/>
-      <p:pic>
-        <p:nvPicPr>
-          <p:cNvPr id="3" name="표지 그림" descr="wedding-17.jpg"/>
-          <p:cNvPicPr>
-            <a:picLocks noChangeAspect="1"/>
-          </p:cNvPicPr>
-          <p:nvPr/>
-        </p:nvPicPr>
-        <p:blipFill>
-          <a:blip r:embed="rId2"/>
-          <a:stretch>
-            <a:fillRect/>
-          </a:stretch>
-        </p:blipFill>
+      <p:sp>
+        <p:nvSpPr>
+          <p:cNvPr id="3" name="사진 자리"/>
+          <p:cNvSpPr/>
+          <p:nvPr/>
+        </p:nvSpPr>
         <p:spPr>
           <a:xfrm>
             <a:off x="0" y="0"/>
-            <a:ext cx="12191695" cy="6858000"/>
+            <a:ext cx="4389010" cy="6858000"/>
           </a:xfrm>
           <a:prstGeom prst="rect">
             <a:avLst/>
           </a:prstGeom>
-        </p:spPr>
-      </p:pic>
+          <a:solidFill>
+            <a:srgbClr val="F3E1A5"/>
+          </a:solidFill>
+          <a:ln>
+            <a:noFill/>
+          </a:ln>
+        </p:spPr>
+        <p:txBody>
+          <a:bodyPr rtlCol="0" anchor="ctr" wrap="square" lIns="54864" rIns="54864" tIns="27432" bIns="27432">
+            <a:noAutofit/>
+          </a:bodyPr>
+          <a:lstStyle/>
+          <a:p>
+            <a:pPr algn="ctr">
+              <a:lnSpc>
+                <a:spcPct val="100000"/>
+              </a:lnSpc>
+            </a:pPr>
+            <a:r>
+              <a:rPr sz="1400" b="0" i="0">
+                <a:solidFill>
+                  <a:srgbClr val="494127"/>
+                </a:solidFill>
+              </a:rPr>
+              <a:t>사진을 넣어 주세요</a:t>
+            </a:r>
+          </a:p>
+        </p:txBody>
+      </p:sp>
+      <p:sp>
+        <p:nvSpPr>
+          <p:cNvPr id="4" name="장식"/>
+          <p:cNvSpPr/>
+          <p:nvPr/>
+        </p:nvSpPr>
+        <p:spPr>
+          <a:xfrm>
+            <a:off x="365750" y="365760"/>
+            <a:ext cx="3657508" cy="6126480"/>
+          </a:xfrm>
+          <a:prstGeom prst="rect">
+            <a:avLst/>
+          </a:prstGeom>
+          <a:noFill/>
+          <a:ln w="9525">
+            <a:solidFill>
+              <a:srgbClr val="26231F"/>
+            </a:solidFill>
+          </a:ln>
+        </p:spPr>
+        <p:txBody>
+          <a:bodyPr rtlCol="0" anchor="ctr"/>
+          <a:lstStyle/>
+          <a:p>
+            <a:pPr algn="ctr"/>
+          </a:p>
+        </p:txBody>
+      </p:sp>
+      <p:sp>
+        <p:nvSpPr>
+          <p:cNvPr id="5" name="라벨"/>
+          <p:cNvSpPr txBox="1"/>
+          <p:nvPr/>
+        </p:nvSpPr>
+        <p:spPr>
+          <a:xfrm>
+            <a:off x="6827349" y="2148840"/>
+            <a:ext cx="4632844" cy="274320"/>
+          </a:xfrm>
+          <a:prstGeom prst="rect">
+            <a:avLst/>
+          </a:prstGeom>
+          <a:noFill/>
+        </p:spPr>
+        <p:txBody>
+          <a:bodyPr wrap="square" lIns="54864" rIns="54864" tIns="27432" bIns="27432" anchor="t">
+            <a:noAutofit/>
+          </a:bodyPr>
+          <a:lstStyle/>
+          <a:p>
+            <a:pPr algn="l">
+              <a:lnSpc>
+                <a:spcPct val="115000"/>
+              </a:lnSpc>
+            </a:pPr>
+            <a:r>
+              <a:rPr sz="1000" b="1" i="0" spc="250">
+                <a:solidFill>
+                  <a:srgbClr val="26231F"/>
+                </a:solidFill>
+              </a:rPr>
+              <a:t>WEDDING</a:t>
+            </a:r>
+          </a:p>
+        </p:txBody>
+      </p:sp>
       <p:sp>
         <p:nvSpPr>
           <p:cNvPr id="2" name="Title 1"/>
@@ -5689,8 +6229,8 @@
         </p:nvSpPr>
         <p:spPr>
           <a:xfrm>
-            <a:off x="853418" y="2057400"/>
-            <a:ext cx="6095847" cy="1554480"/>
+            <a:off x="6827349" y="2606040"/>
+            <a:ext cx="4632844" cy="1188720"/>
           </a:xfrm>
         </p:spPr>
         <p:txBody>
@@ -5707,7 +6247,7 @@
             <a:r>
               <a:rPr sz="3400" b="1" i="0">
                 <a:solidFill>
-                  <a:srgbClr val="115F25"/>
+                  <a:srgbClr val="26231F"/>
                 </a:solidFill>
               </a:rPr>
               <a:t>와 주셔서 고맙습니다</a:t>
@@ -5717,14 +6257,14 @@
       </p:sp>
       <p:sp>
         <p:nvSpPr>
-          <p:cNvPr id="4" name="한 줄 문구"/>
+          <p:cNvPr id="6" name="한 줄 문구"/>
           <p:cNvSpPr txBox="1"/>
           <p:nvPr/>
         </p:nvSpPr>
         <p:spPr>
           <a:xfrm>
-            <a:off x="853418" y="3749039"/>
-            <a:ext cx="6095847" cy="822960"/>
+            <a:off x="6827349" y="3886200"/>
+            <a:ext cx="4632844" cy="822960"/>
           </a:xfrm>
           <a:prstGeom prst="rect">
             <a:avLst/>
@@ -5743,9 +6283,9 @@
               </a:lnSpc>
             </a:pPr>
             <a:r>
-              <a:rPr sz="1700" b="0" i="1">
-                <a:solidFill>
-                  <a:srgbClr val="115F25"/>
+              <a:rPr sz="1700" b="0" i="0">
+                <a:solidFill>
+                  <a:srgbClr val="26231F"/>
                 </a:solidFill>
               </a:rPr>
               <a:t>잘 살겠습니다</a:t>
@@ -5755,14 +6295,14 @@
       </p:sp>
       <p:sp>
         <p:nvSpPr>
-          <p:cNvPr id="5" name="안내 문구"/>
+          <p:cNvPr id="7" name="안내 문구"/>
           <p:cNvSpPr txBox="1"/>
           <p:nvPr/>
         </p:nvSpPr>
         <p:spPr>
           <a:xfrm>
-            <a:off x="853418" y="4617720"/>
-            <a:ext cx="6095847" cy="914400"/>
+            <a:off x="6827349" y="4754880"/>
+            <a:ext cx="4632844" cy="914400"/>
           </a:xfrm>
           <a:prstGeom prst="rect">
             <a:avLst/>
@@ -5783,7 +6323,7 @@
             <a:r>
               <a:rPr sz="1400" b="0" i="0">
                 <a:solidFill>
-                  <a:srgbClr val="666666"/>
+                  <a:srgbClr val="26231F"/>
                 </a:solidFill>
               </a:rPr>
               <a:t>신랑 이름 ♥ 신부 이름</a:t>
@@ -5810,34 +6350,34 @@
         <a:sysClr val="window" lastClr="FFFFFF"/>
       </a:lt1>
       <a:dk2>
-        <a:srgbClr val="115F25"/>
+        <a:srgbClr val="494127"/>
       </a:dk2>
       <a:lt2>
-        <a:srgbClr val="EEFCF1"/>
+        <a:srgbClr val="FDF8EA"/>
       </a:lt2>
       <a:accent1>
-        <a:srgbClr val="26C54E"/>
+        <a:srgbClr val="EAD07B"/>
       </a:accent1>
       <a:accent2>
-        <a:srgbClr val="209DB6"/>
+        <a:srgbClr val="DCEF9F"/>
       </a:accent2>
       <a:accent3>
-        <a:srgbClr val="115F25"/>
+        <a:srgbClr val="494127"/>
       </a:accent3>
       <a:accent4>
-        <a:srgbClr val="D1FADC"/>
+        <a:srgbClr val="FAF1D1"/>
       </a:accent4>
       <a:accent5>
-        <a:srgbClr val="23B182"/>
+        <a:srgbClr val="E3E08D"/>
       </a:accent5>
       <a:accent6>
-        <a:srgbClr val="709F7C"/>
+        <a:srgbClr val="928D7D"/>
       </a:accent6>
       <a:hlink>
-        <a:srgbClr val="26C54E"/>
+        <a:srgbClr val="EAD07B"/>
       </a:hlink>
       <a:folHlink>
-        <a:srgbClr val="115F25"/>
+        <a:srgbClr val="494127"/>
       </a:folHlink>
     </a:clrScheme>
     <a:fontScheme name="Office">
